--- a/work/защита.pptx
+++ b/work/защита.pptx
@@ -4,17 +4,20 @@
   <p:sldMasterIdLst>
     <p:sldMasterId id="2147483648" r:id="rId1"/>
   </p:sldMasterIdLst>
+  <p:notesMasterIdLst>
+    <p:notesMasterId r:id="rId13"/>
+  </p:notesMasterIdLst>
   <p:sldIdLst>
     <p:sldId id="256" r:id="rId2"/>
-    <p:sldId id="257" r:id="rId3"/>
-    <p:sldId id="258" r:id="rId4"/>
-    <p:sldId id="263" r:id="rId5"/>
-    <p:sldId id="265" r:id="rId6"/>
-    <p:sldId id="259" r:id="rId7"/>
-    <p:sldId id="260" r:id="rId8"/>
-    <p:sldId id="261" r:id="rId9"/>
-    <p:sldId id="262" r:id="rId10"/>
-    <p:sldId id="264" r:id="rId11"/>
+    <p:sldId id="263" r:id="rId3"/>
+    <p:sldId id="257" r:id="rId4"/>
+    <p:sldId id="258" r:id="rId5"/>
+    <p:sldId id="259" r:id="rId6"/>
+    <p:sldId id="260" r:id="rId7"/>
+    <p:sldId id="261" r:id="rId8"/>
+    <p:sldId id="262" r:id="rId9"/>
+    <p:sldId id="264" r:id="rId10"/>
+    <p:sldId id="265" r:id="rId11"/>
     <p:sldId id="266" r:id="rId12"/>
   </p:sldIdLst>
   <p:sldSz cx="18288000" cy="10287000"/>
@@ -22,18 +25,18 @@
   <p:embeddedFontLst>
     <p:embeddedFont>
       <p:font typeface="DM Serif Display" panose="020B0604020202020204" charset="0"/>
-      <p:regular r:id="rId13"/>
+      <p:regular r:id="rId14"/>
     </p:embeddedFont>
     <p:embeddedFont>
       <p:font typeface="Calibri" panose="020F0502020204030204" pitchFamily="34" charset="0"/>
-      <p:regular r:id="rId14"/>
-      <p:bold r:id="rId15"/>
-      <p:italic r:id="rId16"/>
-      <p:boldItalic r:id="rId17"/>
+      <p:regular r:id="rId15"/>
+      <p:bold r:id="rId16"/>
+      <p:italic r:id="rId17"/>
+      <p:boldItalic r:id="rId18"/>
     </p:embeddedFont>
     <p:embeddedFont>
       <p:font typeface="Open Sauce" panose="020B0604020202020204" charset="0"/>
-      <p:regular r:id="rId18"/>
+      <p:regular r:id="rId19"/>
     </p:embeddedFont>
   </p:embeddedFontLst>
   <p:defaultTextStyle>
@@ -148,6 +151,1204 @@
     </p:ext>
   </p:extLst>
 </p:presentation>
+</file>
+
+<file path=ppt/notesMasters/notesMaster1.xml><?xml version="1.0" encoding="utf-8"?>
+<p:notesMaster xmlns:a="http://schemas.openxmlformats.org/drawingml/2006/main" xmlns:r="http://schemas.openxmlformats.org/officeDocument/2006/relationships" xmlns:p="http://schemas.openxmlformats.org/presentationml/2006/main">
+  <p:cSld>
+    <p:bg>
+      <p:bgRef idx="1001">
+        <a:schemeClr val="bg1"/>
+      </p:bgRef>
+    </p:bg>
+    <p:spTree>
+      <p:nvGrpSpPr>
+        <p:cNvPr id="1" name=""/>
+        <p:cNvGrpSpPr/>
+        <p:nvPr/>
+      </p:nvGrpSpPr>
+      <p:grpSpPr>
+        <a:xfrm>
+          <a:off x="0" y="0"/>
+          <a:ext cx="0" cy="0"/>
+          <a:chOff x="0" y="0"/>
+          <a:chExt cx="0" cy="0"/>
+        </a:xfrm>
+      </p:grpSpPr>
+      <p:sp>
+        <p:nvSpPr>
+          <p:cNvPr id="2" name="Header Placeholder 1"/>
+          <p:cNvSpPr>
+            <a:spLocks noGrp="1"/>
+          </p:cNvSpPr>
+          <p:nvPr>
+            <p:ph type="hdr" sz="quarter"/>
+          </p:nvPr>
+        </p:nvSpPr>
+        <p:spPr>
+          <a:xfrm>
+            <a:off x="0" y="0"/>
+            <a:ext cx="2971800" cy="458788"/>
+          </a:xfrm>
+          <a:prstGeom prst="rect">
+            <a:avLst/>
+          </a:prstGeom>
+        </p:spPr>
+        <p:txBody>
+          <a:bodyPr vert="horz" lIns="91440" tIns="45720" rIns="91440" bIns="45720" rtlCol="0"/>
+          <a:lstStyle>
+            <a:lvl1pPr algn="l">
+              <a:defRPr sz="1200"/>
+            </a:lvl1pPr>
+          </a:lstStyle>
+          <a:p>
+            <a:endParaRPr lang="bg-BG"/>
+          </a:p>
+        </p:txBody>
+      </p:sp>
+      <p:sp>
+        <p:nvSpPr>
+          <p:cNvPr id="3" name="Date Placeholder 2"/>
+          <p:cNvSpPr>
+            <a:spLocks noGrp="1"/>
+          </p:cNvSpPr>
+          <p:nvPr>
+            <p:ph type="dt" idx="1"/>
+          </p:nvPr>
+        </p:nvSpPr>
+        <p:spPr>
+          <a:xfrm>
+            <a:off x="3884613" y="0"/>
+            <a:ext cx="2971800" cy="458788"/>
+          </a:xfrm>
+          <a:prstGeom prst="rect">
+            <a:avLst/>
+          </a:prstGeom>
+        </p:spPr>
+        <p:txBody>
+          <a:bodyPr vert="horz" lIns="91440" tIns="45720" rIns="91440" bIns="45720" rtlCol="0"/>
+          <a:lstStyle>
+            <a:lvl1pPr algn="r">
+              <a:defRPr sz="1200"/>
+            </a:lvl1pPr>
+          </a:lstStyle>
+          <a:p>
+            <a:fld id="{434DB1AA-D1FB-44F9-A451-FC38E02B8B16}" type="datetimeFigureOut">
+              <a:rPr lang="bg-BG" smtClean="0"/>
+              <a:t>22.4.2026 г.</a:t>
+            </a:fld>
+            <a:endParaRPr lang="bg-BG"/>
+          </a:p>
+        </p:txBody>
+      </p:sp>
+      <p:sp>
+        <p:nvSpPr>
+          <p:cNvPr id="4" name="Slide Image Placeholder 3"/>
+          <p:cNvSpPr>
+            <a:spLocks noGrp="1" noRot="1" noChangeAspect="1"/>
+          </p:cNvSpPr>
+          <p:nvPr>
+            <p:ph type="sldImg" idx="2"/>
+          </p:nvPr>
+        </p:nvSpPr>
+        <p:spPr>
+          <a:xfrm>
+            <a:off x="685800" y="1143000"/>
+            <a:ext cx="5486400" cy="3086100"/>
+          </a:xfrm>
+          <a:prstGeom prst="rect">
+            <a:avLst/>
+          </a:prstGeom>
+          <a:noFill/>
+          <a:ln w="12700">
+            <a:solidFill>
+              <a:prstClr val="black"/>
+            </a:solidFill>
+          </a:ln>
+        </p:spPr>
+        <p:txBody>
+          <a:bodyPr vert="horz" lIns="91440" tIns="45720" rIns="91440" bIns="45720" rtlCol="0" anchor="ctr"/>
+          <a:lstStyle/>
+          <a:p>
+            <a:endParaRPr lang="bg-BG"/>
+          </a:p>
+        </p:txBody>
+      </p:sp>
+      <p:sp>
+        <p:nvSpPr>
+          <p:cNvPr id="5" name="Notes Placeholder 4"/>
+          <p:cNvSpPr>
+            <a:spLocks noGrp="1"/>
+          </p:cNvSpPr>
+          <p:nvPr>
+            <p:ph type="body" sz="quarter" idx="3"/>
+          </p:nvPr>
+        </p:nvSpPr>
+        <p:spPr>
+          <a:xfrm>
+            <a:off x="685800" y="4400550"/>
+            <a:ext cx="5486400" cy="3600450"/>
+          </a:xfrm>
+          <a:prstGeom prst="rect">
+            <a:avLst/>
+          </a:prstGeom>
+        </p:spPr>
+        <p:txBody>
+          <a:bodyPr vert="horz" lIns="91440" tIns="45720" rIns="91440" bIns="45720" rtlCol="0"/>
+          <a:lstStyle/>
+          <a:p>
+            <a:pPr lvl="0"/>
+            <a:r>
+              <a:rPr lang="en-US" smtClean="0"/>
+              <a:t>Edit Master text styles</a:t>
+            </a:r>
+          </a:p>
+          <a:p>
+            <a:pPr lvl="1"/>
+            <a:r>
+              <a:rPr lang="en-US" smtClean="0"/>
+              <a:t>Second level</a:t>
+            </a:r>
+          </a:p>
+          <a:p>
+            <a:pPr lvl="2"/>
+            <a:r>
+              <a:rPr lang="en-US" smtClean="0"/>
+              <a:t>Third level</a:t>
+            </a:r>
+          </a:p>
+          <a:p>
+            <a:pPr lvl="3"/>
+            <a:r>
+              <a:rPr lang="en-US" smtClean="0"/>
+              <a:t>Fourth level</a:t>
+            </a:r>
+          </a:p>
+          <a:p>
+            <a:pPr lvl="4"/>
+            <a:r>
+              <a:rPr lang="en-US" smtClean="0"/>
+              <a:t>Fifth level</a:t>
+            </a:r>
+            <a:endParaRPr lang="bg-BG"/>
+          </a:p>
+        </p:txBody>
+      </p:sp>
+      <p:sp>
+        <p:nvSpPr>
+          <p:cNvPr id="6" name="Footer Placeholder 5"/>
+          <p:cNvSpPr>
+            <a:spLocks noGrp="1"/>
+          </p:cNvSpPr>
+          <p:nvPr>
+            <p:ph type="ftr" sz="quarter" idx="4"/>
+          </p:nvPr>
+        </p:nvSpPr>
+        <p:spPr>
+          <a:xfrm>
+            <a:off x="0" y="8685213"/>
+            <a:ext cx="2971800" cy="458787"/>
+          </a:xfrm>
+          <a:prstGeom prst="rect">
+            <a:avLst/>
+          </a:prstGeom>
+        </p:spPr>
+        <p:txBody>
+          <a:bodyPr vert="horz" lIns="91440" tIns="45720" rIns="91440" bIns="45720" rtlCol="0" anchor="b"/>
+          <a:lstStyle>
+            <a:lvl1pPr algn="l">
+              <a:defRPr sz="1200"/>
+            </a:lvl1pPr>
+          </a:lstStyle>
+          <a:p>
+            <a:endParaRPr lang="bg-BG"/>
+          </a:p>
+        </p:txBody>
+      </p:sp>
+      <p:sp>
+        <p:nvSpPr>
+          <p:cNvPr id="7" name="Slide Number Placeholder 6"/>
+          <p:cNvSpPr>
+            <a:spLocks noGrp="1"/>
+          </p:cNvSpPr>
+          <p:nvPr>
+            <p:ph type="sldNum" sz="quarter" idx="5"/>
+          </p:nvPr>
+        </p:nvSpPr>
+        <p:spPr>
+          <a:xfrm>
+            <a:off x="3884613" y="8685213"/>
+            <a:ext cx="2971800" cy="458787"/>
+          </a:xfrm>
+          <a:prstGeom prst="rect">
+            <a:avLst/>
+          </a:prstGeom>
+        </p:spPr>
+        <p:txBody>
+          <a:bodyPr vert="horz" lIns="91440" tIns="45720" rIns="91440" bIns="45720" rtlCol="0" anchor="b"/>
+          <a:lstStyle>
+            <a:lvl1pPr algn="r">
+              <a:defRPr sz="1200"/>
+            </a:lvl1pPr>
+          </a:lstStyle>
+          <a:p>
+            <a:fld id="{CAE155CA-47F0-4F3B-9362-9018BFDF32B3}" type="slidenum">
+              <a:rPr lang="bg-BG" smtClean="0"/>
+              <a:t>‹#›</a:t>
+            </a:fld>
+            <a:endParaRPr lang="bg-BG"/>
+          </a:p>
+        </p:txBody>
+      </p:sp>
+    </p:spTree>
+    <p:extLst>
+      <p:ext uri="{BB962C8B-B14F-4D97-AF65-F5344CB8AC3E}">
+        <p14:creationId xmlns:p14="http://schemas.microsoft.com/office/powerpoint/2010/main" val="3260155392"/>
+      </p:ext>
+    </p:extLst>
+  </p:cSld>
+  <p:clrMap bg1="lt1" tx1="dk1" bg2="lt2" tx2="dk2" accent1="accent1" accent2="accent2" accent3="accent3" accent4="accent4" accent5="accent5" accent6="accent6" hlink="hlink" folHlink="folHlink"/>
+  <p:notesStyle>
+    <a:lvl1pPr marL="0" algn="l" defTabSz="914400" rtl="0" eaLnBrk="1" latinLnBrk="0" hangingPunct="1">
+      <a:defRPr sz="1200" kern="1200">
+        <a:solidFill>
+          <a:schemeClr val="tx1"/>
+        </a:solidFill>
+        <a:latin typeface="+mn-lt"/>
+        <a:ea typeface="+mn-ea"/>
+        <a:cs typeface="+mn-cs"/>
+      </a:defRPr>
+    </a:lvl1pPr>
+    <a:lvl2pPr marL="457200" algn="l" defTabSz="914400" rtl="0" eaLnBrk="1" latinLnBrk="0" hangingPunct="1">
+      <a:defRPr sz="1200" kern="1200">
+        <a:solidFill>
+          <a:schemeClr val="tx1"/>
+        </a:solidFill>
+        <a:latin typeface="+mn-lt"/>
+        <a:ea typeface="+mn-ea"/>
+        <a:cs typeface="+mn-cs"/>
+      </a:defRPr>
+    </a:lvl2pPr>
+    <a:lvl3pPr marL="914400" algn="l" defTabSz="914400" rtl="0" eaLnBrk="1" latinLnBrk="0" hangingPunct="1">
+      <a:defRPr sz="1200" kern="1200">
+        <a:solidFill>
+          <a:schemeClr val="tx1"/>
+        </a:solidFill>
+        <a:latin typeface="+mn-lt"/>
+        <a:ea typeface="+mn-ea"/>
+        <a:cs typeface="+mn-cs"/>
+      </a:defRPr>
+    </a:lvl3pPr>
+    <a:lvl4pPr marL="1371600" algn="l" defTabSz="914400" rtl="0" eaLnBrk="1" latinLnBrk="0" hangingPunct="1">
+      <a:defRPr sz="1200" kern="1200">
+        <a:solidFill>
+          <a:schemeClr val="tx1"/>
+        </a:solidFill>
+        <a:latin typeface="+mn-lt"/>
+        <a:ea typeface="+mn-ea"/>
+        <a:cs typeface="+mn-cs"/>
+      </a:defRPr>
+    </a:lvl4pPr>
+    <a:lvl5pPr marL="1828800" algn="l" defTabSz="914400" rtl="0" eaLnBrk="1" latinLnBrk="0" hangingPunct="1">
+      <a:defRPr sz="1200" kern="1200">
+        <a:solidFill>
+          <a:schemeClr val="tx1"/>
+        </a:solidFill>
+        <a:latin typeface="+mn-lt"/>
+        <a:ea typeface="+mn-ea"/>
+        <a:cs typeface="+mn-cs"/>
+      </a:defRPr>
+    </a:lvl5pPr>
+    <a:lvl6pPr marL="2286000" algn="l" defTabSz="914400" rtl="0" eaLnBrk="1" latinLnBrk="0" hangingPunct="1">
+      <a:defRPr sz="1200" kern="1200">
+        <a:solidFill>
+          <a:schemeClr val="tx1"/>
+        </a:solidFill>
+        <a:latin typeface="+mn-lt"/>
+        <a:ea typeface="+mn-ea"/>
+        <a:cs typeface="+mn-cs"/>
+      </a:defRPr>
+    </a:lvl6pPr>
+    <a:lvl7pPr marL="2743200" algn="l" defTabSz="914400" rtl="0" eaLnBrk="1" latinLnBrk="0" hangingPunct="1">
+      <a:defRPr sz="1200" kern="1200">
+        <a:solidFill>
+          <a:schemeClr val="tx1"/>
+        </a:solidFill>
+        <a:latin typeface="+mn-lt"/>
+        <a:ea typeface="+mn-ea"/>
+        <a:cs typeface="+mn-cs"/>
+      </a:defRPr>
+    </a:lvl7pPr>
+    <a:lvl8pPr marL="3200400" algn="l" defTabSz="914400" rtl="0" eaLnBrk="1" latinLnBrk="0" hangingPunct="1">
+      <a:defRPr sz="1200" kern="1200">
+        <a:solidFill>
+          <a:schemeClr val="tx1"/>
+        </a:solidFill>
+        <a:latin typeface="+mn-lt"/>
+        <a:ea typeface="+mn-ea"/>
+        <a:cs typeface="+mn-cs"/>
+      </a:defRPr>
+    </a:lvl8pPr>
+    <a:lvl9pPr marL="3657600" algn="l" defTabSz="914400" rtl="0" eaLnBrk="1" latinLnBrk="0" hangingPunct="1">
+      <a:defRPr sz="1200" kern="1200">
+        <a:solidFill>
+          <a:schemeClr val="tx1"/>
+        </a:solidFill>
+        <a:latin typeface="+mn-lt"/>
+        <a:ea typeface="+mn-ea"/>
+        <a:cs typeface="+mn-cs"/>
+      </a:defRPr>
+    </a:lvl9pPr>
+  </p:notesStyle>
+</p:notesMaster>
+</file>
+
+<file path=ppt/notesSlides/notesSlide1.xml><?xml version="1.0" encoding="utf-8"?>
+<p:notes xmlns:a="http://schemas.openxmlformats.org/drawingml/2006/main" xmlns:r="http://schemas.openxmlformats.org/officeDocument/2006/relationships" xmlns:p="http://schemas.openxmlformats.org/presentationml/2006/main">
+  <p:cSld>
+    <p:spTree>
+      <p:nvGrpSpPr>
+        <p:cNvPr id="1" name=""/>
+        <p:cNvGrpSpPr/>
+        <p:nvPr/>
+      </p:nvGrpSpPr>
+      <p:grpSpPr>
+        <a:xfrm>
+          <a:off x="0" y="0"/>
+          <a:ext cx="0" cy="0"/>
+          <a:chOff x="0" y="0"/>
+          <a:chExt cx="0" cy="0"/>
+        </a:xfrm>
+      </p:grpSpPr>
+      <p:sp>
+        <p:nvSpPr>
+          <p:cNvPr id="2" name="Slide Image Placeholder 1"/>
+          <p:cNvSpPr>
+            <a:spLocks noGrp="1" noRot="1" noChangeAspect="1"/>
+          </p:cNvSpPr>
+          <p:nvPr>
+            <p:ph type="sldImg"/>
+          </p:nvPr>
+        </p:nvSpPr>
+        <p:spPr/>
+      </p:sp>
+      <p:sp>
+        <p:nvSpPr>
+          <p:cNvPr id="3" name="Notes Placeholder 2"/>
+          <p:cNvSpPr>
+            <a:spLocks noGrp="1"/>
+          </p:cNvSpPr>
+          <p:nvPr>
+            <p:ph type="body" idx="1"/>
+          </p:nvPr>
+        </p:nvSpPr>
+        <p:spPr/>
+        <p:txBody>
+          <a:bodyPr/>
+          <a:lstStyle/>
+          <a:p>
+            <a:r>
+              <a:rPr lang="ru-RU" dirty="0" smtClean="0"/>
+              <a:t>Системата има за задача автоматизирано генериране на PDF сертификати, като запазва точното оформление на шаблона. Чрез структурирани входни данни се постига повторяемост и коректно попълване на динамични полета за много получатели.</a:t>
+            </a:r>
+            <a:endParaRPr lang="bg-BG" dirty="0"/>
+          </a:p>
+        </p:txBody>
+      </p:sp>
+      <p:sp>
+        <p:nvSpPr>
+          <p:cNvPr id="4" name="Slide Number Placeholder 3"/>
+          <p:cNvSpPr>
+            <a:spLocks noGrp="1"/>
+          </p:cNvSpPr>
+          <p:nvPr>
+            <p:ph type="sldNum" sz="quarter" idx="10"/>
+          </p:nvPr>
+        </p:nvSpPr>
+        <p:spPr/>
+        <p:txBody>
+          <a:bodyPr/>
+          <a:lstStyle/>
+          <a:p>
+            <a:fld id="{CAE155CA-47F0-4F3B-9362-9018BFDF32B3}" type="slidenum">
+              <a:rPr lang="bg-BG" smtClean="0"/>
+              <a:t>1</a:t>
+            </a:fld>
+            <a:endParaRPr lang="bg-BG"/>
+          </a:p>
+        </p:txBody>
+      </p:sp>
+    </p:spTree>
+    <p:extLst>
+      <p:ext uri="{BB962C8B-B14F-4D97-AF65-F5344CB8AC3E}">
+        <p14:creationId xmlns:p14="http://schemas.microsoft.com/office/powerpoint/2010/main" val="1644964889"/>
+      </p:ext>
+    </p:extLst>
+  </p:cSld>
+  <p:clrMapOvr>
+    <a:masterClrMapping/>
+  </p:clrMapOvr>
+</p:notes>
+</file>
+
+<file path=ppt/notesSlides/notesSlide2.xml><?xml version="1.0" encoding="utf-8"?>
+<p:notes xmlns:a="http://schemas.openxmlformats.org/drawingml/2006/main" xmlns:r="http://schemas.openxmlformats.org/officeDocument/2006/relationships" xmlns:p="http://schemas.openxmlformats.org/presentationml/2006/main">
+  <p:cSld>
+    <p:spTree>
+      <p:nvGrpSpPr>
+        <p:cNvPr id="1" name=""/>
+        <p:cNvGrpSpPr/>
+        <p:nvPr/>
+      </p:nvGrpSpPr>
+      <p:grpSpPr>
+        <a:xfrm>
+          <a:off x="0" y="0"/>
+          <a:ext cx="0" cy="0"/>
+          <a:chOff x="0" y="0"/>
+          <a:chExt cx="0" cy="0"/>
+        </a:xfrm>
+      </p:grpSpPr>
+      <p:sp>
+        <p:nvSpPr>
+          <p:cNvPr id="2" name="Slide Image Placeholder 1"/>
+          <p:cNvSpPr>
+            <a:spLocks noGrp="1" noRot="1" noChangeAspect="1"/>
+          </p:cNvSpPr>
+          <p:nvPr>
+            <p:ph type="sldImg"/>
+          </p:nvPr>
+        </p:nvSpPr>
+        <p:spPr/>
+      </p:sp>
+      <p:sp>
+        <p:nvSpPr>
+          <p:cNvPr id="3" name="Notes Placeholder 2"/>
+          <p:cNvSpPr>
+            <a:spLocks noGrp="1"/>
+          </p:cNvSpPr>
+          <p:nvPr>
+            <p:ph type="body" idx="1"/>
+          </p:nvPr>
+        </p:nvSpPr>
+        <p:spPr/>
+        <p:txBody>
+          <a:bodyPr/>
+          <a:lstStyle/>
+          <a:p>
+            <a:r>
+              <a:rPr lang="ru-RU" dirty="0" smtClean="0"/>
+              <a:t>Сертификатите комбинират визуален дизайн (рамки, лого, фон) с точни места за текст (име, курс/тема, дати, номер). Критично е оформлението да остане стабилно при различни стойности и дължини на данните.</a:t>
+            </a:r>
+            <a:endParaRPr lang="bg-BG" dirty="0"/>
+          </a:p>
+        </p:txBody>
+      </p:sp>
+      <p:sp>
+        <p:nvSpPr>
+          <p:cNvPr id="4" name="Slide Number Placeholder 3"/>
+          <p:cNvSpPr>
+            <a:spLocks noGrp="1"/>
+          </p:cNvSpPr>
+          <p:nvPr>
+            <p:ph type="sldNum" sz="quarter" idx="10"/>
+          </p:nvPr>
+        </p:nvSpPr>
+        <p:spPr/>
+        <p:txBody>
+          <a:bodyPr/>
+          <a:lstStyle/>
+          <a:p>
+            <a:fld id="{CAE155CA-47F0-4F3B-9362-9018BFDF32B3}" type="slidenum">
+              <a:rPr lang="bg-BG" smtClean="0"/>
+              <a:t>2</a:t>
+            </a:fld>
+            <a:endParaRPr lang="bg-BG"/>
+          </a:p>
+        </p:txBody>
+      </p:sp>
+    </p:spTree>
+    <p:extLst>
+      <p:ext uri="{BB962C8B-B14F-4D97-AF65-F5344CB8AC3E}">
+        <p14:creationId xmlns:p14="http://schemas.microsoft.com/office/powerpoint/2010/main" val="605787216"/>
+      </p:ext>
+    </p:extLst>
+  </p:cSld>
+  <p:clrMapOvr>
+    <a:masterClrMapping/>
+  </p:clrMapOvr>
+</p:notes>
+</file>
+
+<file path=ppt/notesSlides/notesSlide3.xml><?xml version="1.0" encoding="utf-8"?>
+<p:notes xmlns:a="http://schemas.openxmlformats.org/drawingml/2006/main" xmlns:r="http://schemas.openxmlformats.org/officeDocument/2006/relationships" xmlns:p="http://schemas.openxmlformats.org/presentationml/2006/main">
+  <p:cSld>
+    <p:spTree>
+      <p:nvGrpSpPr>
+        <p:cNvPr id="1" name=""/>
+        <p:cNvGrpSpPr/>
+        <p:nvPr/>
+      </p:nvGrpSpPr>
+      <p:grpSpPr>
+        <a:xfrm>
+          <a:off x="0" y="0"/>
+          <a:ext cx="0" cy="0"/>
+          <a:chOff x="0" y="0"/>
+          <a:chExt cx="0" cy="0"/>
+        </a:xfrm>
+      </p:grpSpPr>
+      <p:sp>
+        <p:nvSpPr>
+          <p:cNvPr id="2" name="Slide Image Placeholder 1"/>
+          <p:cNvSpPr>
+            <a:spLocks noGrp="1" noRot="1" noChangeAspect="1"/>
+          </p:cNvSpPr>
+          <p:nvPr>
+            <p:ph type="sldImg"/>
+          </p:nvPr>
+        </p:nvSpPr>
+        <p:spPr/>
+      </p:sp>
+      <p:sp>
+        <p:nvSpPr>
+          <p:cNvPr id="3" name="Notes Placeholder 2"/>
+          <p:cNvSpPr>
+            <a:spLocks noGrp="1"/>
+          </p:cNvSpPr>
+          <p:nvPr>
+            <p:ph type="body" idx="1"/>
+          </p:nvPr>
+        </p:nvSpPr>
+        <p:spPr/>
+        <p:txBody>
+          <a:bodyPr/>
+          <a:lstStyle/>
+          <a:p>
+            <a:r>
+              <a:rPr lang="ru-RU" dirty="0" smtClean="0"/>
+              <a:t>Двустъпков подход за PDF генерация</a:t>
+            </a:r>
+          </a:p>
+          <a:p>
+            <a:r>
+              <a:rPr lang="ru-RU" dirty="0" smtClean="0"/>
+              <a:t>Генераторът използва двустъпкова схема: първо се прави „текстов слой“ (прозрачен PDF) с рисуван текст на точни координати, а след това този слой се наслагва върху базовия PDF шаблон. Така се гарантира висока точност и без разминавания при позициониране.</a:t>
+            </a:r>
+            <a:endParaRPr lang="bg-BG" dirty="0"/>
+          </a:p>
+        </p:txBody>
+      </p:sp>
+      <p:sp>
+        <p:nvSpPr>
+          <p:cNvPr id="4" name="Slide Number Placeholder 3"/>
+          <p:cNvSpPr>
+            <a:spLocks noGrp="1"/>
+          </p:cNvSpPr>
+          <p:nvPr>
+            <p:ph type="sldNum" sz="quarter" idx="10"/>
+          </p:nvPr>
+        </p:nvSpPr>
+        <p:spPr/>
+        <p:txBody>
+          <a:bodyPr/>
+          <a:lstStyle/>
+          <a:p>
+            <a:fld id="{CAE155CA-47F0-4F3B-9362-9018BFDF32B3}" type="slidenum">
+              <a:rPr lang="bg-BG" smtClean="0"/>
+              <a:t>3</a:t>
+            </a:fld>
+            <a:endParaRPr lang="bg-BG"/>
+          </a:p>
+        </p:txBody>
+      </p:sp>
+    </p:spTree>
+    <p:extLst>
+      <p:ext uri="{BB962C8B-B14F-4D97-AF65-F5344CB8AC3E}">
+        <p14:creationId xmlns:p14="http://schemas.microsoft.com/office/powerpoint/2010/main" val="1380075957"/>
+      </p:ext>
+    </p:extLst>
+  </p:cSld>
+  <p:clrMapOvr>
+    <a:masterClrMapping/>
+  </p:clrMapOvr>
+</p:notes>
+</file>
+
+<file path=ppt/notesSlides/notesSlide4.xml><?xml version="1.0" encoding="utf-8"?>
+<p:notes xmlns:a="http://schemas.openxmlformats.org/drawingml/2006/main" xmlns:r="http://schemas.openxmlformats.org/officeDocument/2006/relationships" xmlns:p="http://schemas.openxmlformats.org/presentationml/2006/main">
+  <p:cSld>
+    <p:spTree>
+      <p:nvGrpSpPr>
+        <p:cNvPr id="1" name=""/>
+        <p:cNvGrpSpPr/>
+        <p:nvPr/>
+      </p:nvGrpSpPr>
+      <p:grpSpPr>
+        <a:xfrm>
+          <a:off x="0" y="0"/>
+          <a:ext cx="0" cy="0"/>
+          <a:chOff x="0" y="0"/>
+          <a:chExt cx="0" cy="0"/>
+        </a:xfrm>
+      </p:grpSpPr>
+      <p:sp>
+        <p:nvSpPr>
+          <p:cNvPr id="2" name="Slide Image Placeholder 1"/>
+          <p:cNvSpPr>
+            <a:spLocks noGrp="1" noRot="1" noChangeAspect="1"/>
+          </p:cNvSpPr>
+          <p:nvPr>
+            <p:ph type="sldImg"/>
+          </p:nvPr>
+        </p:nvSpPr>
+        <p:spPr/>
+      </p:sp>
+      <p:sp>
+        <p:nvSpPr>
+          <p:cNvPr id="3" name="Notes Placeholder 2"/>
+          <p:cNvSpPr>
+            <a:spLocks noGrp="1"/>
+          </p:cNvSpPr>
+          <p:nvPr>
+            <p:ph type="body" idx="1"/>
+          </p:nvPr>
+        </p:nvSpPr>
+        <p:spPr/>
+        <p:txBody>
+          <a:bodyPr/>
+          <a:lstStyle/>
+          <a:p>
+            <a:r>
+              <a:rPr lang="ru-RU" dirty="0" smtClean="0"/>
+              <a:t>Поддържане на точността на оформлението</a:t>
+            </a:r>
+          </a:p>
+          <a:p>
+            <a:r>
+              <a:rPr lang="ru-RU" dirty="0" smtClean="0"/>
+              <a:t>Точността зависи от коректно зададени координати спрямо PDF координатната система, където началото е в долния ляв ъгъл. Посочва се, че координатите трябва да се нагласят спрямо конкретния дизайн на бланката, за да няма “разместен layout” и препълване.</a:t>
+            </a:r>
+          </a:p>
+          <a:p>
+            <a:endParaRPr lang="ru-RU" dirty="0" smtClean="0"/>
+          </a:p>
+        </p:txBody>
+      </p:sp>
+      <p:sp>
+        <p:nvSpPr>
+          <p:cNvPr id="4" name="Slide Number Placeholder 3"/>
+          <p:cNvSpPr>
+            <a:spLocks noGrp="1"/>
+          </p:cNvSpPr>
+          <p:nvPr>
+            <p:ph type="sldNum" sz="quarter" idx="10"/>
+          </p:nvPr>
+        </p:nvSpPr>
+        <p:spPr/>
+        <p:txBody>
+          <a:bodyPr/>
+          <a:lstStyle/>
+          <a:p>
+            <a:fld id="{CAE155CA-47F0-4F3B-9362-9018BFDF32B3}" type="slidenum">
+              <a:rPr lang="bg-BG" smtClean="0"/>
+              <a:t>4</a:t>
+            </a:fld>
+            <a:endParaRPr lang="bg-BG"/>
+          </a:p>
+        </p:txBody>
+      </p:sp>
+    </p:spTree>
+    <p:extLst>
+      <p:ext uri="{BB962C8B-B14F-4D97-AF65-F5344CB8AC3E}">
+        <p14:creationId xmlns:p14="http://schemas.microsoft.com/office/powerpoint/2010/main" val="1826411485"/>
+      </p:ext>
+    </p:extLst>
+  </p:cSld>
+  <p:clrMapOvr>
+    <a:masterClrMapping/>
+  </p:clrMapOvr>
+</p:notes>
+</file>
+
+<file path=ppt/notesSlides/notesSlide5.xml><?xml version="1.0" encoding="utf-8"?>
+<p:notes xmlns:a="http://schemas.openxmlformats.org/drawingml/2006/main" xmlns:r="http://schemas.openxmlformats.org/officeDocument/2006/relationships" xmlns:p="http://schemas.openxmlformats.org/presentationml/2006/main">
+  <p:cSld>
+    <p:spTree>
+      <p:nvGrpSpPr>
+        <p:cNvPr id="1" name=""/>
+        <p:cNvGrpSpPr/>
+        <p:nvPr/>
+      </p:nvGrpSpPr>
+      <p:grpSpPr>
+        <a:xfrm>
+          <a:off x="0" y="0"/>
+          <a:ext cx="0" cy="0"/>
+          <a:chOff x="0" y="0"/>
+          <a:chExt cx="0" cy="0"/>
+        </a:xfrm>
+      </p:grpSpPr>
+      <p:sp>
+        <p:nvSpPr>
+          <p:cNvPr id="2" name="Slide Image Placeholder 1"/>
+          <p:cNvSpPr>
+            <a:spLocks noGrp="1" noRot="1" noChangeAspect="1"/>
+          </p:cNvSpPr>
+          <p:nvPr>
+            <p:ph type="sldImg"/>
+          </p:nvPr>
+        </p:nvSpPr>
+        <p:spPr/>
+      </p:sp>
+      <p:sp>
+        <p:nvSpPr>
+          <p:cNvPr id="3" name="Notes Placeholder 2"/>
+          <p:cNvSpPr>
+            <a:spLocks noGrp="1"/>
+          </p:cNvSpPr>
+          <p:nvPr>
+            <p:ph type="body" idx="1"/>
+          </p:nvPr>
+        </p:nvSpPr>
+        <p:spPr/>
+        <p:txBody>
+          <a:bodyPr/>
+          <a:lstStyle/>
+          <a:p>
+            <a:r>
+              <a:rPr lang="ru-RU" dirty="0" smtClean="0"/>
+              <a:t>Алгоритми за позициониране и синхронизация (Preview ↔ PDF)</a:t>
+            </a:r>
+          </a:p>
+          <a:p>
+            <a:r>
+              <a:rPr lang="ru-RU" dirty="0" smtClean="0"/>
+              <a:t>Текстовите полета в браузъра (Live Preview) трябва да се синхронизират с реалните позиции в PDF. Системата изчислява мащаб между изображението в интерфейса и размерите на PDF страницата и преобразува координатите динамично.</a:t>
+            </a:r>
+          </a:p>
+          <a:p>
+            <a:endParaRPr lang="ru-RU" dirty="0" smtClean="0"/>
+          </a:p>
+          <a:p>
+            <a:endParaRPr lang="bg-BG" dirty="0"/>
+          </a:p>
+        </p:txBody>
+      </p:sp>
+      <p:sp>
+        <p:nvSpPr>
+          <p:cNvPr id="4" name="Slide Number Placeholder 3"/>
+          <p:cNvSpPr>
+            <a:spLocks noGrp="1"/>
+          </p:cNvSpPr>
+          <p:nvPr>
+            <p:ph type="sldNum" sz="quarter" idx="10"/>
+          </p:nvPr>
+        </p:nvSpPr>
+        <p:spPr/>
+        <p:txBody>
+          <a:bodyPr/>
+          <a:lstStyle/>
+          <a:p>
+            <a:fld id="{CAE155CA-47F0-4F3B-9362-9018BFDF32B3}" type="slidenum">
+              <a:rPr lang="bg-BG" smtClean="0"/>
+              <a:t>5</a:t>
+            </a:fld>
+            <a:endParaRPr lang="bg-BG"/>
+          </a:p>
+        </p:txBody>
+      </p:sp>
+    </p:spTree>
+    <p:extLst>
+      <p:ext uri="{BB962C8B-B14F-4D97-AF65-F5344CB8AC3E}">
+        <p14:creationId xmlns:p14="http://schemas.microsoft.com/office/powerpoint/2010/main" val="2188982350"/>
+      </p:ext>
+    </p:extLst>
+  </p:cSld>
+  <p:clrMapOvr>
+    <a:masterClrMapping/>
+  </p:clrMapOvr>
+</p:notes>
+</file>
+
+<file path=ppt/notesSlides/notesSlide6.xml><?xml version="1.0" encoding="utf-8"?>
+<p:notes xmlns:a="http://schemas.openxmlformats.org/drawingml/2006/main" xmlns:r="http://schemas.openxmlformats.org/officeDocument/2006/relationships" xmlns:p="http://schemas.openxmlformats.org/presentationml/2006/main">
+  <p:cSld>
+    <p:spTree>
+      <p:nvGrpSpPr>
+        <p:cNvPr id="1" name=""/>
+        <p:cNvGrpSpPr/>
+        <p:nvPr/>
+      </p:nvGrpSpPr>
+      <p:grpSpPr>
+        <a:xfrm>
+          <a:off x="0" y="0"/>
+          <a:ext cx="0" cy="0"/>
+          <a:chOff x="0" y="0"/>
+          <a:chExt cx="0" cy="0"/>
+        </a:xfrm>
+      </p:grpSpPr>
+      <p:sp>
+        <p:nvSpPr>
+          <p:cNvPr id="2" name="Slide Image Placeholder 1"/>
+          <p:cNvSpPr>
+            <a:spLocks noGrp="1" noRot="1" noChangeAspect="1"/>
+          </p:cNvSpPr>
+          <p:nvPr>
+            <p:ph type="sldImg"/>
+          </p:nvPr>
+        </p:nvSpPr>
+        <p:spPr/>
+      </p:sp>
+      <p:sp>
+        <p:nvSpPr>
+          <p:cNvPr id="3" name="Notes Placeholder 2"/>
+          <p:cNvSpPr>
+            <a:spLocks noGrp="1"/>
+          </p:cNvSpPr>
+          <p:nvPr>
+            <p:ph type="body" idx="1"/>
+          </p:nvPr>
+        </p:nvSpPr>
+        <p:spPr/>
+        <p:txBody>
+          <a:bodyPr/>
+          <a:lstStyle/>
+          <a:p>
+            <a:r>
+              <a:rPr lang="ru-RU" dirty="0" smtClean="0"/>
+              <a:t>Работа с таблични данни (Excel/CSV)</a:t>
+            </a:r>
+          </a:p>
+          <a:p>
+            <a:r>
+              <a:rPr lang="ru-RU" dirty="0" smtClean="0"/>
+              <a:t>Сертификатите се генерират от таблици с участници, което изисква надеждно парсване и нормализиране на данните. Премахват се празни редове и се валидират ключови полета, за да се избегнат грешки при попълването и изписването.</a:t>
+            </a:r>
+            <a:endParaRPr lang="bg-BG" dirty="0"/>
+          </a:p>
+        </p:txBody>
+      </p:sp>
+      <p:sp>
+        <p:nvSpPr>
+          <p:cNvPr id="4" name="Slide Number Placeholder 3"/>
+          <p:cNvSpPr>
+            <a:spLocks noGrp="1"/>
+          </p:cNvSpPr>
+          <p:nvPr>
+            <p:ph type="sldNum" sz="quarter" idx="10"/>
+          </p:nvPr>
+        </p:nvSpPr>
+        <p:spPr/>
+        <p:txBody>
+          <a:bodyPr/>
+          <a:lstStyle/>
+          <a:p>
+            <a:fld id="{CAE155CA-47F0-4F3B-9362-9018BFDF32B3}" type="slidenum">
+              <a:rPr lang="bg-BG" smtClean="0"/>
+              <a:t>6</a:t>
+            </a:fld>
+            <a:endParaRPr lang="bg-BG"/>
+          </a:p>
+        </p:txBody>
+      </p:sp>
+    </p:spTree>
+    <p:extLst>
+      <p:ext uri="{BB962C8B-B14F-4D97-AF65-F5344CB8AC3E}">
+        <p14:creationId xmlns:p14="http://schemas.microsoft.com/office/powerpoint/2010/main" val="797302302"/>
+      </p:ext>
+    </p:extLst>
+  </p:cSld>
+  <p:clrMapOvr>
+    <a:masterClrMapping/>
+  </p:clrMapOvr>
+</p:notes>
+</file>
+
+<file path=ppt/notesSlides/notesSlide7.xml><?xml version="1.0" encoding="utf-8"?>
+<p:notes xmlns:a="http://schemas.openxmlformats.org/drawingml/2006/main" xmlns:r="http://schemas.openxmlformats.org/officeDocument/2006/relationships" xmlns:p="http://schemas.openxmlformats.org/presentationml/2006/main">
+  <p:cSld>
+    <p:spTree>
+      <p:nvGrpSpPr>
+        <p:cNvPr id="1" name=""/>
+        <p:cNvGrpSpPr/>
+        <p:nvPr/>
+      </p:nvGrpSpPr>
+      <p:grpSpPr>
+        <a:xfrm>
+          <a:off x="0" y="0"/>
+          <a:ext cx="0" cy="0"/>
+          <a:chOff x="0" y="0"/>
+          <a:chExt cx="0" cy="0"/>
+        </a:xfrm>
+      </p:grpSpPr>
+      <p:sp>
+        <p:nvSpPr>
+          <p:cNvPr id="2" name="Slide Image Placeholder 1"/>
+          <p:cNvSpPr>
+            <a:spLocks noGrp="1" noRot="1" noChangeAspect="1"/>
+          </p:cNvSpPr>
+          <p:nvPr>
+            <p:ph type="sldImg"/>
+          </p:nvPr>
+        </p:nvSpPr>
+        <p:spPr/>
+      </p:sp>
+      <p:sp>
+        <p:nvSpPr>
+          <p:cNvPr id="3" name="Notes Placeholder 2"/>
+          <p:cNvSpPr>
+            <a:spLocks noGrp="1"/>
+          </p:cNvSpPr>
+          <p:nvPr>
+            <p:ph type="body" idx="1"/>
+          </p:nvPr>
+        </p:nvSpPr>
+        <p:spPr/>
+        <p:txBody>
+          <a:bodyPr/>
+          <a:lstStyle/>
+          <a:p>
+            <a:r>
+              <a:rPr lang="ru-RU" dirty="0" smtClean="0"/>
+              <a:t>Архитектура и технологичен стек (Backend/Frontend)</a:t>
+            </a:r>
+          </a:p>
+          <a:p>
+            <a:r>
+              <a:rPr lang="ru-RU" dirty="0" smtClean="0"/>
+              <a:t>Решението е реализирано с разделение на роли: бекенд на Django + DRF (REST API, сигурност, обработка и генерация), и фронтенд на Vue.js + axios (интерактивен интерфейс). Така се осигурява производителност, скалируемост и удобен workflow за потребителя.</a:t>
+            </a:r>
+            <a:endParaRPr lang="bg-BG" dirty="0"/>
+          </a:p>
+        </p:txBody>
+      </p:sp>
+      <p:sp>
+        <p:nvSpPr>
+          <p:cNvPr id="4" name="Slide Number Placeholder 3"/>
+          <p:cNvSpPr>
+            <a:spLocks noGrp="1"/>
+          </p:cNvSpPr>
+          <p:nvPr>
+            <p:ph type="sldNum" sz="quarter" idx="10"/>
+          </p:nvPr>
+        </p:nvSpPr>
+        <p:spPr/>
+        <p:txBody>
+          <a:bodyPr/>
+          <a:lstStyle/>
+          <a:p>
+            <a:fld id="{CAE155CA-47F0-4F3B-9362-9018BFDF32B3}" type="slidenum">
+              <a:rPr lang="bg-BG" smtClean="0"/>
+              <a:t>7</a:t>
+            </a:fld>
+            <a:endParaRPr lang="bg-BG"/>
+          </a:p>
+        </p:txBody>
+      </p:sp>
+    </p:spTree>
+    <p:extLst>
+      <p:ext uri="{BB962C8B-B14F-4D97-AF65-F5344CB8AC3E}">
+        <p14:creationId xmlns:p14="http://schemas.microsoft.com/office/powerpoint/2010/main" val="1615556315"/>
+      </p:ext>
+    </p:extLst>
+  </p:cSld>
+  <p:clrMapOvr>
+    <a:masterClrMapping/>
+  </p:clrMapOvr>
+</p:notes>
+</file>
+
+<file path=ppt/notesSlides/notesSlide8.xml><?xml version="1.0" encoding="utf-8"?>
+<p:notes xmlns:a="http://schemas.openxmlformats.org/drawingml/2006/main" xmlns:r="http://schemas.openxmlformats.org/officeDocument/2006/relationships" xmlns:p="http://schemas.openxmlformats.org/presentationml/2006/main">
+  <p:cSld>
+    <p:spTree>
+      <p:nvGrpSpPr>
+        <p:cNvPr id="1" name=""/>
+        <p:cNvGrpSpPr/>
+        <p:nvPr/>
+      </p:nvGrpSpPr>
+      <p:grpSpPr>
+        <a:xfrm>
+          <a:off x="0" y="0"/>
+          <a:ext cx="0" cy="0"/>
+          <a:chOff x="0" y="0"/>
+          <a:chExt cx="0" cy="0"/>
+        </a:xfrm>
+      </p:grpSpPr>
+      <p:sp>
+        <p:nvSpPr>
+          <p:cNvPr id="2" name="Slide Image Placeholder 1"/>
+          <p:cNvSpPr>
+            <a:spLocks noGrp="1" noRot="1" noChangeAspect="1"/>
+          </p:cNvSpPr>
+          <p:nvPr>
+            <p:ph type="sldImg"/>
+          </p:nvPr>
+        </p:nvSpPr>
+        <p:spPr/>
+      </p:sp>
+      <p:sp>
+        <p:nvSpPr>
+          <p:cNvPr id="3" name="Notes Placeholder 2"/>
+          <p:cNvSpPr>
+            <a:spLocks noGrp="1"/>
+          </p:cNvSpPr>
+          <p:nvPr>
+            <p:ph type="body" idx="1"/>
+          </p:nvPr>
+        </p:nvSpPr>
+        <p:spPr/>
+        <p:txBody>
+          <a:bodyPr/>
+          <a:lstStyle/>
+          <a:p>
+            <a:r>
+              <a:rPr lang="ru-RU" dirty="0" smtClean="0"/>
+              <a:t>Интерактивен модул: Drag-and-Drop позициониране</a:t>
+            </a:r>
+          </a:p>
+          <a:p>
+            <a:r>
+              <a:rPr lang="ru-RU" dirty="0" smtClean="0"/>
+              <a:t>В интерфейса потребителят позиционира текстовите полета върху шаблона чрез drag-and-drop. Координатите се преизчисляват в реално време и се използват директно при генерирането на PDF сертификатите.</a:t>
+            </a:r>
+          </a:p>
+          <a:p>
+            <a:endParaRPr lang="ru-RU" dirty="0" smtClean="0"/>
+          </a:p>
+          <a:p>
+            <a:endParaRPr lang="bg-BG" dirty="0"/>
+          </a:p>
+        </p:txBody>
+      </p:sp>
+      <p:sp>
+        <p:nvSpPr>
+          <p:cNvPr id="4" name="Slide Number Placeholder 3"/>
+          <p:cNvSpPr>
+            <a:spLocks noGrp="1"/>
+          </p:cNvSpPr>
+          <p:nvPr>
+            <p:ph type="sldNum" sz="quarter" idx="10"/>
+          </p:nvPr>
+        </p:nvSpPr>
+        <p:spPr/>
+        <p:txBody>
+          <a:bodyPr/>
+          <a:lstStyle/>
+          <a:p>
+            <a:fld id="{CAE155CA-47F0-4F3B-9362-9018BFDF32B3}" type="slidenum">
+              <a:rPr lang="bg-BG" smtClean="0"/>
+              <a:t>8</a:t>
+            </a:fld>
+            <a:endParaRPr lang="bg-BG"/>
+          </a:p>
+        </p:txBody>
+      </p:sp>
+    </p:spTree>
+    <p:extLst>
+      <p:ext uri="{BB962C8B-B14F-4D97-AF65-F5344CB8AC3E}">
+        <p14:creationId xmlns:p14="http://schemas.microsoft.com/office/powerpoint/2010/main" val="864537306"/>
+      </p:ext>
+    </p:extLst>
+  </p:cSld>
+  <p:clrMapOvr>
+    <a:masterClrMapping/>
+  </p:clrMapOvr>
+</p:notes>
+</file>
+
+<file path=ppt/notesSlides/notesSlide9.xml><?xml version="1.0" encoding="utf-8"?>
+<p:notes xmlns:a="http://schemas.openxmlformats.org/drawingml/2006/main" xmlns:r="http://schemas.openxmlformats.org/officeDocument/2006/relationships" xmlns:p="http://schemas.openxmlformats.org/presentationml/2006/main">
+  <p:cSld>
+    <p:spTree>
+      <p:nvGrpSpPr>
+        <p:cNvPr id="1" name=""/>
+        <p:cNvGrpSpPr/>
+        <p:nvPr/>
+      </p:nvGrpSpPr>
+      <p:grpSpPr>
+        <a:xfrm>
+          <a:off x="0" y="0"/>
+          <a:ext cx="0" cy="0"/>
+          <a:chOff x="0" y="0"/>
+          <a:chExt cx="0" cy="0"/>
+        </a:xfrm>
+      </p:grpSpPr>
+      <p:sp>
+        <p:nvSpPr>
+          <p:cNvPr id="2" name="Slide Image Placeholder 1"/>
+          <p:cNvSpPr>
+            <a:spLocks noGrp="1" noRot="1" noChangeAspect="1"/>
+          </p:cNvSpPr>
+          <p:nvPr>
+            <p:ph type="sldImg"/>
+          </p:nvPr>
+        </p:nvSpPr>
+        <p:spPr/>
+      </p:sp>
+      <p:sp>
+        <p:nvSpPr>
+          <p:cNvPr id="3" name="Notes Placeholder 2"/>
+          <p:cNvSpPr>
+            <a:spLocks noGrp="1"/>
+          </p:cNvSpPr>
+          <p:nvPr>
+            <p:ph type="body" idx="1"/>
+          </p:nvPr>
+        </p:nvSpPr>
+        <p:spPr/>
+        <p:txBody>
+          <a:bodyPr/>
+          <a:lstStyle/>
+          <a:p>
+            <a:r>
+              <a:rPr lang="ru-RU" dirty="0" smtClean="0"/>
+              <a:t>Сигурност и оптимизации + извод</a:t>
+            </a:r>
+          </a:p>
+          <a:p>
+            <a:r>
+              <a:rPr lang="ru-RU" dirty="0" smtClean="0"/>
+              <a:t>Важни са мерките за сигурност, включително защита от CSRF при заявките към бекенда. Добавени са и оптимизации за производителност чрез in-memory processing и пакетиране в ZIP архив, за да се генерират бързо сертификати дори при по-голям брой участници.</a:t>
+            </a:r>
+          </a:p>
+          <a:p>
+            <a:endParaRPr lang="ru-RU" dirty="0"/>
+          </a:p>
+        </p:txBody>
+      </p:sp>
+      <p:sp>
+        <p:nvSpPr>
+          <p:cNvPr id="4" name="Slide Number Placeholder 3"/>
+          <p:cNvSpPr>
+            <a:spLocks noGrp="1"/>
+          </p:cNvSpPr>
+          <p:nvPr>
+            <p:ph type="sldNum" sz="quarter" idx="10"/>
+          </p:nvPr>
+        </p:nvSpPr>
+        <p:spPr/>
+        <p:txBody>
+          <a:bodyPr/>
+          <a:lstStyle/>
+          <a:p>
+            <a:fld id="{CAE155CA-47F0-4F3B-9362-9018BFDF32B3}" type="slidenum">
+              <a:rPr lang="bg-BG" smtClean="0"/>
+              <a:t>9</a:t>
+            </a:fld>
+            <a:endParaRPr lang="bg-BG"/>
+          </a:p>
+        </p:txBody>
+      </p:sp>
+    </p:spTree>
+    <p:extLst>
+      <p:ext uri="{BB962C8B-B14F-4D97-AF65-F5344CB8AC3E}">
+        <p14:creationId xmlns:p14="http://schemas.microsoft.com/office/powerpoint/2010/main" val="936050044"/>
+      </p:ext>
+    </p:extLst>
+  </p:cSld>
+  <p:clrMapOvr>
+    <a:masterClrMapping/>
+  </p:clrMapOvr>
+</p:notes>
 </file>
 
 <file path=ppt/slideLayouts/slideLayout1.xml><?xml version="1.0" encoding="utf-8"?>
@@ -3141,7 +4342,7 @@
             </a:pathLst>
           </a:custGeom>
           <a:blipFill>
-            <a:blip r:embed="rId2">
+            <a:blip r:embed="rId3">
               <a:alphaModFix amt="50000"/>
             </a:blip>
             <a:stretch>
@@ -3379,7 +4580,7 @@
           <p:nvPr/>
         </p:nvPicPr>
         <p:blipFill>
-          <a:blip r:embed="rId3"/>
+          <a:blip r:embed="rId4"/>
           <a:stretch>
             <a:fillRect/>
           </a:stretch>
@@ -3427,7 +4628,7 @@
         </p:nvSpPr>
         <p:spPr>
           <a:xfrm>
-            <a:off x="0" y="0"/>
+            <a:off x="32657" y="0"/>
             <a:ext cx="18288000" cy="10287000"/>
           </a:xfrm>
           <a:custGeom>
@@ -3537,10 +4738,130 @@
                 <a:cs typeface="Open Sauce"/>
                 <a:sym typeface="Open Sauce"/>
               </a:rPr>
-              <a:t>9</a:t>
-            </a:r>
-          </a:p>
-        </p:txBody>
+              <a:t>10</a:t>
+            </a:r>
+          </a:p>
+        </p:txBody>
+      </p:sp>
+      <p:sp>
+        <p:nvSpPr>
+          <p:cNvPr id="5" name="AutoShape 5"/>
+          <p:cNvSpPr/>
+          <p:nvPr/>
+        </p:nvSpPr>
+        <p:spPr>
+          <a:xfrm>
+            <a:off x="1175924" y="5715000"/>
+            <a:ext cx="15936153" cy="0"/>
+          </a:xfrm>
+          <a:prstGeom prst="line">
+            <a:avLst/>
+          </a:prstGeom>
+          <a:ln w="38100" cap="flat">
+            <a:solidFill>
+              <a:srgbClr val="000000"/>
+            </a:solidFill>
+            <a:prstDash val="solid"/>
+            <a:headEnd type="none" w="sm" len="sm"/>
+            <a:tailEnd type="none" w="sm" len="sm"/>
+          </a:ln>
+        </p:spPr>
+      </p:sp>
+      <p:sp>
+        <p:nvSpPr>
+          <p:cNvPr id="6" name="AutoShape 6"/>
+          <p:cNvSpPr/>
+          <p:nvPr/>
+        </p:nvSpPr>
+        <p:spPr>
+          <a:xfrm>
+            <a:off x="1747424" y="3785659"/>
+            <a:ext cx="0" cy="1940701"/>
+          </a:xfrm>
+          <a:prstGeom prst="line">
+            <a:avLst/>
+          </a:prstGeom>
+          <a:ln w="38100" cap="rnd">
+            <a:solidFill>
+              <a:srgbClr val="000000"/>
+            </a:solidFill>
+            <a:prstDash val="solid"/>
+            <a:headEnd type="oval" w="lg" len="lg"/>
+            <a:tailEnd type="none" w="sm" len="sm"/>
+          </a:ln>
+        </p:spPr>
+      </p:sp>
+      <p:sp>
+        <p:nvSpPr>
+          <p:cNvPr id="7" name="AutoShape 7"/>
+          <p:cNvSpPr/>
+          <p:nvPr/>
+        </p:nvSpPr>
+        <p:spPr>
+          <a:xfrm>
+            <a:off x="5348870" y="5684662"/>
+            <a:ext cx="0" cy="1940701"/>
+          </a:xfrm>
+          <a:prstGeom prst="line">
+            <a:avLst/>
+          </a:prstGeom>
+          <a:ln w="38100" cap="rnd">
+            <a:solidFill>
+              <a:srgbClr val="000000"/>
+            </a:solidFill>
+            <a:prstDash val="solid"/>
+            <a:headEnd type="none" w="sm" len="sm"/>
+            <a:tailEnd type="oval" w="lg" len="lg"/>
+          </a:ln>
+        </p:spPr>
+      </p:sp>
+      <p:sp>
+        <p:nvSpPr>
+          <p:cNvPr id="8" name="AutoShape 8"/>
+          <p:cNvSpPr/>
+          <p:nvPr/>
+        </p:nvSpPr>
+        <p:spPr>
+          <a:xfrm>
+            <a:off x="9707729" y="3785659"/>
+            <a:ext cx="0" cy="1940701"/>
+          </a:xfrm>
+          <a:prstGeom prst="line">
+            <a:avLst/>
+          </a:prstGeom>
+          <a:ln w="38100" cap="rnd">
+            <a:solidFill>
+              <a:srgbClr val="000000"/>
+            </a:solidFill>
+            <a:prstDash val="solid"/>
+            <a:headEnd type="oval" w="lg" len="lg"/>
+            <a:tailEnd type="none" w="sm" len="sm"/>
+          </a:ln>
+        </p:spPr>
+      </p:sp>
+      <p:sp>
+        <p:nvSpPr>
+          <p:cNvPr id="9" name="AutoShape 9"/>
+          <p:cNvSpPr/>
+          <p:nvPr/>
+        </p:nvSpPr>
+        <p:spPr>
+          <a:xfrm>
+            <a:off x="13309175" y="5684662"/>
+            <a:ext cx="0" cy="1940701"/>
+          </a:xfrm>
+          <a:prstGeom prst="line">
+            <a:avLst/>
+          </a:prstGeom>
+          <a:ln w="38100" cap="rnd">
+            <a:solidFill>
+              <a:srgbClr val="000000"/>
+            </a:solidFill>
+            <a:prstDash val="solid"/>
+            <a:headEnd type="none" w="sm" len="sm"/>
+            <a:tailEnd type="oval" w="lg" len="lg"/>
+          </a:ln>
+        </p:spPr>
       </p:sp>
     </p:spTree>
   </p:cSld>
@@ -3689,7 +5010,7 @@
         </p:nvSpPr>
         <p:spPr>
           <a:xfrm>
-            <a:off x="0" y="0"/>
+            <a:off x="28303" y="190500"/>
             <a:ext cx="18288000" cy="10287000"/>
           </a:xfrm>
           <a:custGeom>
@@ -3720,7 +5041,7 @@
             </a:pathLst>
           </a:custGeom>
           <a:blipFill>
-            <a:blip r:embed="rId2">
+            <a:blip r:embed="rId3">
               <a:alphaModFix amt="50000"/>
             </a:blip>
             <a:stretch>
@@ -3734,210 +5055,6 @@
           </a:ln>
         </p:spPr>
       </p:sp>
-      <p:sp>
-        <p:nvSpPr>
-          <p:cNvPr id="3" name="AutoShape 3"/>
-          <p:cNvSpPr/>
-          <p:nvPr/>
-        </p:nvSpPr>
-        <p:spPr>
-          <a:xfrm>
-            <a:off x="1166399" y="1028700"/>
-            <a:ext cx="687324" cy="0"/>
-          </a:xfrm>
-          <a:prstGeom prst="line">
-            <a:avLst/>
-          </a:prstGeom>
-          <a:ln w="76200" cap="flat">
-            <a:solidFill>
-              <a:srgbClr val="000000"/>
-            </a:solidFill>
-            <a:prstDash val="solid"/>
-            <a:headEnd type="none" w="sm" len="sm"/>
-            <a:tailEnd type="none" w="sm" len="sm"/>
-          </a:ln>
-        </p:spPr>
-      </p:sp>
-    </p:spTree>
-  </p:cSld>
-  <p:clrMapOvr>
-    <a:masterClrMapping/>
-  </p:clrMapOvr>
-</p:sld>
-</file>
-
-<file path=ppt/slides/slide3.xml><?xml version="1.0" encoding="utf-8"?>
-<p:sld xmlns:a="http://schemas.openxmlformats.org/drawingml/2006/main" xmlns:r="http://schemas.openxmlformats.org/officeDocument/2006/relationships" xmlns:p="http://schemas.openxmlformats.org/presentationml/2006/main">
-  <p:cSld>
-    <p:spTree>
-      <p:nvGrpSpPr>
-        <p:cNvPr id="1" name=""/>
-        <p:cNvGrpSpPr/>
-        <p:nvPr/>
-      </p:nvGrpSpPr>
-      <p:grpSpPr>
-        <a:xfrm>
-          <a:off x="0" y="0"/>
-          <a:ext cx="0" cy="0"/>
-          <a:chOff x="0" y="0"/>
-          <a:chExt cx="0" cy="0"/>
-        </a:xfrm>
-      </p:grpSpPr>
-      <p:sp>
-        <p:nvSpPr>
-          <p:cNvPr id="2" name="Freeform 2"/>
-          <p:cNvSpPr/>
-          <p:nvPr/>
-        </p:nvSpPr>
-        <p:spPr>
-          <a:xfrm>
-            <a:off x="0" y="0"/>
-            <a:ext cx="18288000" cy="10287000"/>
-          </a:xfrm>
-          <a:custGeom>
-            <a:avLst/>
-            <a:gdLst/>
-            <a:ahLst/>
-            <a:cxnLst/>
-            <a:rect l="l" t="t" r="r" b="b"/>
-            <a:pathLst>
-              <a:path w="18288000" h="10287000">
-                <a:moveTo>
-                  <a:pt x="0" y="0"/>
-                </a:moveTo>
-                <a:lnTo>
-                  <a:pt x="18288000" y="0"/>
-                </a:lnTo>
-                <a:lnTo>
-                  <a:pt x="18288000" y="10287000"/>
-                </a:lnTo>
-                <a:lnTo>
-                  <a:pt x="0" y="10287000"/>
-                </a:lnTo>
-                <a:lnTo>
-                  <a:pt x="0" y="0"/>
-                </a:lnTo>
-                <a:close/>
-              </a:path>
-            </a:pathLst>
-          </a:custGeom>
-          <a:blipFill>
-            <a:blip r:embed="rId2">
-              <a:alphaModFix amt="50000"/>
-            </a:blip>
-            <a:stretch>
-              <a:fillRect/>
-            </a:stretch>
-          </a:blipFill>
-          <a:ln cap="sq">
-            <a:noFill/>
-            <a:prstDash val="solid"/>
-            <a:miter/>
-          </a:ln>
-        </p:spPr>
-      </p:sp>
-      <p:sp>
-        <p:nvSpPr>
-          <p:cNvPr id="3" name="AutoShape 3"/>
-          <p:cNvSpPr/>
-          <p:nvPr/>
-        </p:nvSpPr>
-        <p:spPr>
-          <a:xfrm>
-            <a:off x="1166399" y="1028700"/>
-            <a:ext cx="687324" cy="0"/>
-          </a:xfrm>
-          <a:prstGeom prst="line">
-            <a:avLst/>
-          </a:prstGeom>
-          <a:ln w="76200" cap="flat">
-            <a:solidFill>
-              <a:srgbClr val="000000"/>
-            </a:solidFill>
-            <a:prstDash val="solid"/>
-            <a:headEnd type="none" w="sm" len="sm"/>
-            <a:tailEnd type="none" w="sm" len="sm"/>
-          </a:ln>
-        </p:spPr>
-      </p:sp>
-    </p:spTree>
-  </p:cSld>
-  <p:clrMapOvr>
-    <a:masterClrMapping/>
-  </p:clrMapOvr>
-</p:sld>
-</file>
-
-<file path=ppt/slides/slide4.xml><?xml version="1.0" encoding="utf-8"?>
-<p:sld xmlns:a="http://schemas.openxmlformats.org/drawingml/2006/main" xmlns:r="http://schemas.openxmlformats.org/officeDocument/2006/relationships" xmlns:p="http://schemas.openxmlformats.org/presentationml/2006/main">
-  <p:cSld>
-    <p:spTree>
-      <p:nvGrpSpPr>
-        <p:cNvPr id="1" name=""/>
-        <p:cNvGrpSpPr/>
-        <p:nvPr/>
-      </p:nvGrpSpPr>
-      <p:grpSpPr>
-        <a:xfrm>
-          <a:off x="0" y="0"/>
-          <a:ext cx="0" cy="0"/>
-          <a:chOff x="0" y="0"/>
-          <a:chExt cx="0" cy="0"/>
-        </a:xfrm>
-      </p:grpSpPr>
-      <p:sp>
-        <p:nvSpPr>
-          <p:cNvPr id="2" name="Freeform 2"/>
-          <p:cNvSpPr/>
-          <p:nvPr/>
-        </p:nvSpPr>
-        <p:spPr>
-          <a:xfrm>
-            <a:off x="28303" y="190500"/>
-            <a:ext cx="18288000" cy="10287000"/>
-          </a:xfrm>
-          <a:custGeom>
-            <a:avLst/>
-            <a:gdLst/>
-            <a:ahLst/>
-            <a:cxnLst/>
-            <a:rect l="l" t="t" r="r" b="b"/>
-            <a:pathLst>
-              <a:path w="18288000" h="10287000">
-                <a:moveTo>
-                  <a:pt x="0" y="0"/>
-                </a:moveTo>
-                <a:lnTo>
-                  <a:pt x="18288000" y="0"/>
-                </a:lnTo>
-                <a:lnTo>
-                  <a:pt x="18288000" y="10287000"/>
-                </a:lnTo>
-                <a:lnTo>
-                  <a:pt x="0" y="10287000"/>
-                </a:lnTo>
-                <a:lnTo>
-                  <a:pt x="0" y="0"/>
-                </a:lnTo>
-                <a:close/>
-              </a:path>
-            </a:pathLst>
-          </a:custGeom>
-          <a:blipFill>
-            <a:blip r:embed="rId2">
-              <a:alphaModFix amt="50000"/>
-            </a:blip>
-            <a:stretch>
-              <a:fillRect/>
-            </a:stretch>
-          </a:blipFill>
-          <a:ln cap="sq">
-            <a:noFill/>
-            <a:prstDash val="solid"/>
-            <a:miter/>
-          </a:ln>
-        </p:spPr>
-      </p:sp>
       <p:grpSp>
         <p:nvGrpSpPr>
           <p:cNvPr id="3" name="Group 3"/>
@@ -3946,7 +5063,7 @@
         </p:nvGrpSpPr>
         <p:grpSpPr>
           <a:xfrm>
-            <a:off x="1166399" y="3529532"/>
+            <a:off x="1151158" y="3529532"/>
             <a:ext cx="5026555" cy="4988042"/>
             <a:chOff x="0" y="0"/>
             <a:chExt cx="4489857" cy="4489857"/>
@@ -4368,7 +5485,7 @@
           <p:nvPr/>
         </p:nvPicPr>
         <p:blipFill>
-          <a:blip r:embed="rId3">
+          <a:blip r:embed="rId4">
             <a:extLst>
               <a:ext uri="{28A0092B-C50C-407E-A947-70E740481C1C}">
                 <a14:useLocalDpi xmlns:a14="http://schemas.microsoft.com/office/drawing/2010/main" val="0"/>
@@ -4398,7 +5515,7 @@
           <p:nvPr/>
         </p:nvPicPr>
         <p:blipFill>
-          <a:blip r:embed="rId4" cstate="print">
+          <a:blip r:embed="rId5" cstate="print">
             <a:extLst>
               <a:ext uri="{28A0092B-C50C-407E-A947-70E740481C1C}">
                 <a14:useLocalDpi xmlns:a14="http://schemas.microsoft.com/office/drawing/2010/main" val="0"/>
@@ -4428,7 +5545,7 @@
           <p:nvPr/>
         </p:nvPicPr>
         <p:blipFill>
-          <a:blip r:embed="rId5">
+          <a:blip r:embed="rId6">
             <a:extLst>
               <a:ext uri="{28A0092B-C50C-407E-A947-70E740481C1C}">
                 <a14:useLocalDpi xmlns:a14="http://schemas.microsoft.com/office/drawing/2010/main" val="0"/>
@@ -4449,6 +5566,94 @@
           </a:prstGeom>
         </p:spPr>
       </p:pic>
+      <p:sp>
+        <p:nvSpPr>
+          <p:cNvPr id="19" name="TextBox 18"/>
+          <p:cNvSpPr txBox="1"/>
+          <p:nvPr/>
+        </p:nvSpPr>
+        <p:spPr>
+          <a:xfrm>
+            <a:off x="1546076" y="7200900"/>
+            <a:ext cx="4267200" cy="369332"/>
+          </a:xfrm>
+          <a:prstGeom prst="rect">
+            <a:avLst/>
+          </a:prstGeom>
+          <a:noFill/>
+        </p:spPr>
+        <p:txBody>
+          <a:bodyPr wrap="square" rtlCol="0">
+            <a:spAutoFit/>
+          </a:bodyPr>
+          <a:lstStyle/>
+          <a:p>
+            <a:r>
+              <a:rPr lang="bg-BG"/>
+              <a:t>Сертификат за признателност</a:t>
+            </a:r>
+            <a:endParaRPr lang="bg-BG" dirty="0"/>
+          </a:p>
+        </p:txBody>
+      </p:sp>
+      <p:sp>
+        <p:nvSpPr>
+          <p:cNvPr id="20" name="TextBox 19"/>
+          <p:cNvSpPr txBox="1"/>
+          <p:nvPr/>
+        </p:nvSpPr>
+        <p:spPr>
+          <a:xfrm>
+            <a:off x="6917754" y="7200900"/>
+            <a:ext cx="4541286" cy="369332"/>
+          </a:xfrm>
+          <a:prstGeom prst="rect">
+            <a:avLst/>
+          </a:prstGeom>
+          <a:noFill/>
+        </p:spPr>
+        <p:txBody>
+          <a:bodyPr wrap="square" rtlCol="0">
+            <a:spAutoFit/>
+          </a:bodyPr>
+          <a:lstStyle/>
+          <a:p>
+            <a:r>
+              <a:rPr lang="bg-BG" dirty="0"/>
+              <a:t>Сертификат за участие</a:t>
+            </a:r>
+          </a:p>
+        </p:txBody>
+      </p:sp>
+      <p:sp>
+        <p:nvSpPr>
+          <p:cNvPr id="21" name="TextBox 20"/>
+          <p:cNvSpPr txBox="1"/>
+          <p:nvPr/>
+        </p:nvSpPr>
+        <p:spPr>
+          <a:xfrm>
+            <a:off x="12331032" y="7200900"/>
+            <a:ext cx="4554583" cy="369332"/>
+          </a:xfrm>
+          <a:prstGeom prst="rect">
+            <a:avLst/>
+          </a:prstGeom>
+          <a:noFill/>
+        </p:spPr>
+        <p:txBody>
+          <a:bodyPr wrap="square" rtlCol="0">
+            <a:spAutoFit/>
+          </a:bodyPr>
+          <a:lstStyle/>
+          <a:p>
+            <a:r>
+              <a:rPr lang="bg-BG" dirty="0"/>
+              <a:t>Сертификат за постижение</a:t>
+            </a:r>
+          </a:p>
+        </p:txBody>
+      </p:sp>
     </p:spTree>
   </p:cSld>
   <p:clrMapOvr>
@@ -4457,7 +5662,7 @@
 </p:sld>
 </file>
 
-<file path=ppt/slides/slide5.xml><?xml version="1.0" encoding="utf-8"?>
+<file path=ppt/slides/slide3.xml><?xml version="1.0" encoding="utf-8"?>
 <p:sld xmlns:a="http://schemas.openxmlformats.org/drawingml/2006/main" xmlns:r="http://schemas.openxmlformats.org/officeDocument/2006/relationships" xmlns:p="http://schemas.openxmlformats.org/presentationml/2006/main">
   <p:cSld>
     <p:spTree>
@@ -4482,7 +5687,7 @@
         </p:nvSpPr>
         <p:spPr>
           <a:xfrm>
-            <a:off x="32657" y="0"/>
+            <a:off x="0" y="0"/>
             <a:ext cx="18288000" cy="10287000"/>
           </a:xfrm>
           <a:custGeom>
@@ -4513,7 +5718,7 @@
             </a:pathLst>
           </a:custGeom>
           <a:blipFill>
-            <a:blip r:embed="rId2">
+            <a:blip r:embed="rId3">
               <a:alphaModFix amt="50000"/>
             </a:blip>
             <a:stretch>
@@ -4551,172 +5756,6 @@
           </a:ln>
         </p:spPr>
       </p:sp>
-      <p:sp>
-        <p:nvSpPr>
-          <p:cNvPr id="4" name="TextBox 4"/>
-          <p:cNvSpPr txBox="1"/>
-          <p:nvPr/>
-        </p:nvSpPr>
-        <p:spPr>
-          <a:xfrm>
-            <a:off x="13671125" y="9142095"/>
-            <a:ext cx="3450476" cy="273685"/>
-          </a:xfrm>
-          <a:prstGeom prst="rect">
-            <a:avLst/>
-          </a:prstGeom>
-        </p:spPr>
-        <p:txBody>
-          <a:bodyPr lIns="0" tIns="0" rIns="0" bIns="0" rtlCol="0" anchor="t">
-            <a:spAutoFit/>
-          </a:bodyPr>
-          <a:lstStyle/>
-          <a:p>
-            <a:pPr marL="0" lvl="0" indent="0" algn="r">
-              <a:lnSpc>
-                <a:spcPts val="2239"/>
-              </a:lnSpc>
-              <a:spcBef>
-                <a:spcPct val="0"/>
-              </a:spcBef>
-            </a:pPr>
-            <a:r>
-              <a:rPr lang="en-US" sz="1599" spc="159">
-                <a:solidFill>
-                  <a:srgbClr val="000000">
-                    <a:alpha val="49804"/>
-                  </a:srgbClr>
-                </a:solidFill>
-                <a:latin typeface="Open Sauce"/>
-                <a:ea typeface="Open Sauce"/>
-                <a:cs typeface="Open Sauce"/>
-                <a:sym typeface="Open Sauce"/>
-              </a:rPr>
-              <a:t>10</a:t>
-            </a:r>
-          </a:p>
-        </p:txBody>
-      </p:sp>
-      <p:sp>
-        <p:nvSpPr>
-          <p:cNvPr id="5" name="AutoShape 5"/>
-          <p:cNvSpPr/>
-          <p:nvPr/>
-        </p:nvSpPr>
-        <p:spPr>
-          <a:xfrm>
-            <a:off x="1175924" y="5715000"/>
-            <a:ext cx="15936153" cy="0"/>
-          </a:xfrm>
-          <a:prstGeom prst="line">
-            <a:avLst/>
-          </a:prstGeom>
-          <a:ln w="38100" cap="flat">
-            <a:solidFill>
-              <a:srgbClr val="000000"/>
-            </a:solidFill>
-            <a:prstDash val="solid"/>
-            <a:headEnd type="none" w="sm" len="sm"/>
-            <a:tailEnd type="none" w="sm" len="sm"/>
-          </a:ln>
-        </p:spPr>
-      </p:sp>
-      <p:sp>
-        <p:nvSpPr>
-          <p:cNvPr id="6" name="AutoShape 6"/>
-          <p:cNvSpPr/>
-          <p:nvPr/>
-        </p:nvSpPr>
-        <p:spPr>
-          <a:xfrm>
-            <a:off x="1747424" y="3785659"/>
-            <a:ext cx="0" cy="1940701"/>
-          </a:xfrm>
-          <a:prstGeom prst="line">
-            <a:avLst/>
-          </a:prstGeom>
-          <a:ln w="38100" cap="rnd">
-            <a:solidFill>
-              <a:srgbClr val="000000"/>
-            </a:solidFill>
-            <a:prstDash val="solid"/>
-            <a:headEnd type="oval" w="lg" len="lg"/>
-            <a:tailEnd type="none" w="sm" len="sm"/>
-          </a:ln>
-        </p:spPr>
-      </p:sp>
-      <p:sp>
-        <p:nvSpPr>
-          <p:cNvPr id="7" name="AutoShape 7"/>
-          <p:cNvSpPr/>
-          <p:nvPr/>
-        </p:nvSpPr>
-        <p:spPr>
-          <a:xfrm>
-            <a:off x="5348870" y="5684662"/>
-            <a:ext cx="0" cy="1940701"/>
-          </a:xfrm>
-          <a:prstGeom prst="line">
-            <a:avLst/>
-          </a:prstGeom>
-          <a:ln w="38100" cap="rnd">
-            <a:solidFill>
-              <a:srgbClr val="000000"/>
-            </a:solidFill>
-            <a:prstDash val="solid"/>
-            <a:headEnd type="none" w="sm" len="sm"/>
-            <a:tailEnd type="oval" w="lg" len="lg"/>
-          </a:ln>
-        </p:spPr>
-      </p:sp>
-      <p:sp>
-        <p:nvSpPr>
-          <p:cNvPr id="8" name="AutoShape 8"/>
-          <p:cNvSpPr/>
-          <p:nvPr/>
-        </p:nvSpPr>
-        <p:spPr>
-          <a:xfrm>
-            <a:off x="9707729" y="3785659"/>
-            <a:ext cx="0" cy="1940701"/>
-          </a:xfrm>
-          <a:prstGeom prst="line">
-            <a:avLst/>
-          </a:prstGeom>
-          <a:ln w="38100" cap="rnd">
-            <a:solidFill>
-              <a:srgbClr val="000000"/>
-            </a:solidFill>
-            <a:prstDash val="solid"/>
-            <a:headEnd type="oval" w="lg" len="lg"/>
-            <a:tailEnd type="none" w="sm" len="sm"/>
-          </a:ln>
-        </p:spPr>
-      </p:sp>
-      <p:sp>
-        <p:nvSpPr>
-          <p:cNvPr id="9" name="AutoShape 9"/>
-          <p:cNvSpPr/>
-          <p:nvPr/>
-        </p:nvSpPr>
-        <p:spPr>
-          <a:xfrm>
-            <a:off x="13309175" y="5684662"/>
-            <a:ext cx="0" cy="1940701"/>
-          </a:xfrm>
-          <a:prstGeom prst="line">
-            <a:avLst/>
-          </a:prstGeom>
-          <a:ln w="38100" cap="rnd">
-            <a:solidFill>
-              <a:srgbClr val="000000"/>
-            </a:solidFill>
-            <a:prstDash val="solid"/>
-            <a:headEnd type="none" w="sm" len="sm"/>
-            <a:tailEnd type="oval" w="lg" len="lg"/>
-          </a:ln>
-        </p:spPr>
-      </p:sp>
     </p:spTree>
   </p:cSld>
   <p:clrMapOvr>
@@ -4725,7 +5764,7 @@
 </p:sld>
 </file>
 
-<file path=ppt/slides/slide6.xml><?xml version="1.0" encoding="utf-8"?>
+<file path=ppt/slides/slide4.xml><?xml version="1.0" encoding="utf-8"?>
 <p:sld xmlns:a="http://schemas.openxmlformats.org/drawingml/2006/main" xmlns:r="http://schemas.openxmlformats.org/officeDocument/2006/relationships" xmlns:p="http://schemas.openxmlformats.org/presentationml/2006/main">
   <p:cSld>
     <p:spTree>
@@ -4781,7 +5820,7 @@
             </a:pathLst>
           </a:custGeom>
           <a:blipFill>
-            <a:blip r:embed="rId2">
+            <a:blip r:embed="rId3">
               <a:alphaModFix amt="50000"/>
             </a:blip>
             <a:stretch>
@@ -4827,7 +5866,7 @@
 </p:sld>
 </file>
 
-<file path=ppt/slides/slide7.xml><?xml version="1.0" encoding="utf-8"?>
+<file path=ppt/slides/slide5.xml><?xml version="1.0" encoding="utf-8"?>
 <p:sld xmlns:a="http://schemas.openxmlformats.org/drawingml/2006/main" xmlns:r="http://schemas.openxmlformats.org/officeDocument/2006/relationships" xmlns:p="http://schemas.openxmlformats.org/presentationml/2006/main">
   <p:cSld>
     <p:spTree>
@@ -4883,7 +5922,7 @@
             </a:pathLst>
           </a:custGeom>
           <a:blipFill>
-            <a:blip r:embed="rId2">
+            <a:blip r:embed="rId3">
               <a:alphaModFix amt="50000"/>
             </a:blip>
             <a:stretch>
@@ -4929,7 +5968,7 @@
 </p:sld>
 </file>
 
-<file path=ppt/slides/slide8.xml><?xml version="1.0" encoding="utf-8"?>
+<file path=ppt/slides/slide6.xml><?xml version="1.0" encoding="utf-8"?>
 <p:sld xmlns:a="http://schemas.openxmlformats.org/drawingml/2006/main" xmlns:r="http://schemas.openxmlformats.org/officeDocument/2006/relationships" xmlns:p="http://schemas.openxmlformats.org/presentationml/2006/main">
   <p:cSld>
     <p:spTree>
@@ -4985,7 +6024,7 @@
             </a:pathLst>
           </a:custGeom>
           <a:blipFill>
-            <a:blip r:embed="rId2">
+            <a:blip r:embed="rId3">
               <a:alphaModFix amt="50000"/>
             </a:blip>
             <a:stretch>
@@ -5031,7 +6070,7 @@
 </p:sld>
 </file>
 
-<file path=ppt/slides/slide9.xml><?xml version="1.0" encoding="utf-8"?>
+<file path=ppt/slides/slide7.xml><?xml version="1.0" encoding="utf-8"?>
 <p:sld xmlns:a="http://schemas.openxmlformats.org/drawingml/2006/main" xmlns:r="http://schemas.openxmlformats.org/officeDocument/2006/relationships" xmlns:p="http://schemas.openxmlformats.org/presentationml/2006/main">
   <p:cSld>
     <p:spTree>
@@ -5087,7 +6126,7 @@
             </a:pathLst>
           </a:custGeom>
           <a:blipFill>
-            <a:blip r:embed="rId2">
+            <a:blip r:embed="rId3">
               <a:alphaModFix amt="50000"/>
             </a:blip>
             <a:stretch>
@@ -5103,6 +6142,108 @@
       </p:sp>
       <p:sp>
         <p:nvSpPr>
+          <p:cNvPr id="3" name="AutoShape 3"/>
+          <p:cNvSpPr/>
+          <p:nvPr/>
+        </p:nvSpPr>
+        <p:spPr>
+          <a:xfrm>
+            <a:off x="1166399" y="1028700"/>
+            <a:ext cx="687324" cy="0"/>
+          </a:xfrm>
+          <a:prstGeom prst="line">
+            <a:avLst/>
+          </a:prstGeom>
+          <a:ln w="76200" cap="flat">
+            <a:solidFill>
+              <a:srgbClr val="000000"/>
+            </a:solidFill>
+            <a:prstDash val="solid"/>
+            <a:headEnd type="none" w="sm" len="sm"/>
+            <a:tailEnd type="none" w="sm" len="sm"/>
+          </a:ln>
+        </p:spPr>
+      </p:sp>
+    </p:spTree>
+  </p:cSld>
+  <p:clrMapOvr>
+    <a:masterClrMapping/>
+  </p:clrMapOvr>
+</p:sld>
+</file>
+
+<file path=ppt/slides/slide8.xml><?xml version="1.0" encoding="utf-8"?>
+<p:sld xmlns:a="http://schemas.openxmlformats.org/drawingml/2006/main" xmlns:r="http://schemas.openxmlformats.org/officeDocument/2006/relationships" xmlns:p="http://schemas.openxmlformats.org/presentationml/2006/main">
+  <p:cSld>
+    <p:spTree>
+      <p:nvGrpSpPr>
+        <p:cNvPr id="1" name=""/>
+        <p:cNvGrpSpPr/>
+        <p:nvPr/>
+      </p:nvGrpSpPr>
+      <p:grpSpPr>
+        <a:xfrm>
+          <a:off x="0" y="0"/>
+          <a:ext cx="0" cy="0"/>
+          <a:chOff x="0" y="0"/>
+          <a:chExt cx="0" cy="0"/>
+        </a:xfrm>
+      </p:grpSpPr>
+      <p:sp>
+        <p:nvSpPr>
+          <p:cNvPr id="2" name="Freeform 2"/>
+          <p:cNvSpPr/>
+          <p:nvPr/>
+        </p:nvSpPr>
+        <p:spPr>
+          <a:xfrm>
+            <a:off x="0" y="0"/>
+            <a:ext cx="18288000" cy="10287000"/>
+          </a:xfrm>
+          <a:custGeom>
+            <a:avLst/>
+            <a:gdLst/>
+            <a:ahLst/>
+            <a:cxnLst/>
+            <a:rect l="l" t="t" r="r" b="b"/>
+            <a:pathLst>
+              <a:path w="18288000" h="10287000">
+                <a:moveTo>
+                  <a:pt x="0" y="0"/>
+                </a:moveTo>
+                <a:lnTo>
+                  <a:pt x="18288000" y="0"/>
+                </a:lnTo>
+                <a:lnTo>
+                  <a:pt x="18288000" y="10287000"/>
+                </a:lnTo>
+                <a:lnTo>
+                  <a:pt x="0" y="10287000"/>
+                </a:lnTo>
+                <a:lnTo>
+                  <a:pt x="0" y="0"/>
+                </a:lnTo>
+                <a:close/>
+              </a:path>
+            </a:pathLst>
+          </a:custGeom>
+          <a:blipFill>
+            <a:blip r:embed="rId3">
+              <a:alphaModFix amt="50000"/>
+            </a:blip>
+            <a:stretch>
+              <a:fillRect/>
+            </a:stretch>
+          </a:blipFill>
+          <a:ln cap="sq">
+            <a:noFill/>
+            <a:prstDash val="solid"/>
+            <a:miter/>
+          </a:ln>
+        </p:spPr>
+      </p:sp>
+      <p:sp>
+        <p:nvSpPr>
           <p:cNvPr id="3" name="TextBox 3"/>
           <p:cNvSpPr txBox="1"/>
           <p:nvPr/>
@@ -5170,6 +6311,154 @@
             <a:tailEnd type="none" w="sm" len="sm"/>
           </a:ln>
         </p:spPr>
+      </p:sp>
+    </p:spTree>
+  </p:cSld>
+  <p:clrMapOvr>
+    <a:masterClrMapping/>
+  </p:clrMapOvr>
+</p:sld>
+</file>
+
+<file path=ppt/slides/slide9.xml><?xml version="1.0" encoding="utf-8"?>
+<p:sld xmlns:a="http://schemas.openxmlformats.org/drawingml/2006/main" xmlns:r="http://schemas.openxmlformats.org/officeDocument/2006/relationships" xmlns:p="http://schemas.openxmlformats.org/presentationml/2006/main">
+  <p:cSld>
+    <p:spTree>
+      <p:nvGrpSpPr>
+        <p:cNvPr id="1" name=""/>
+        <p:cNvGrpSpPr/>
+        <p:nvPr/>
+      </p:nvGrpSpPr>
+      <p:grpSpPr>
+        <a:xfrm>
+          <a:off x="0" y="0"/>
+          <a:ext cx="0" cy="0"/>
+          <a:chOff x="0" y="0"/>
+          <a:chExt cx="0" cy="0"/>
+        </a:xfrm>
+      </p:grpSpPr>
+      <p:sp>
+        <p:nvSpPr>
+          <p:cNvPr id="2" name="Freeform 2"/>
+          <p:cNvSpPr/>
+          <p:nvPr/>
+        </p:nvSpPr>
+        <p:spPr>
+          <a:xfrm>
+            <a:off x="0" y="0"/>
+            <a:ext cx="18288000" cy="10287000"/>
+          </a:xfrm>
+          <a:custGeom>
+            <a:avLst/>
+            <a:gdLst/>
+            <a:ahLst/>
+            <a:cxnLst/>
+            <a:rect l="l" t="t" r="r" b="b"/>
+            <a:pathLst>
+              <a:path w="18288000" h="10287000">
+                <a:moveTo>
+                  <a:pt x="0" y="0"/>
+                </a:moveTo>
+                <a:lnTo>
+                  <a:pt x="18288000" y="0"/>
+                </a:lnTo>
+                <a:lnTo>
+                  <a:pt x="18288000" y="10287000"/>
+                </a:lnTo>
+                <a:lnTo>
+                  <a:pt x="0" y="10287000"/>
+                </a:lnTo>
+                <a:lnTo>
+                  <a:pt x="0" y="0"/>
+                </a:lnTo>
+                <a:close/>
+              </a:path>
+            </a:pathLst>
+          </a:custGeom>
+          <a:blipFill>
+            <a:blip r:embed="rId3">
+              <a:alphaModFix amt="50000"/>
+            </a:blip>
+            <a:stretch>
+              <a:fillRect/>
+            </a:stretch>
+          </a:blipFill>
+          <a:ln cap="sq">
+            <a:noFill/>
+            <a:prstDash val="solid"/>
+            <a:miter/>
+          </a:ln>
+        </p:spPr>
+      </p:sp>
+      <p:sp>
+        <p:nvSpPr>
+          <p:cNvPr id="3" name="AutoShape 3"/>
+          <p:cNvSpPr/>
+          <p:nvPr/>
+        </p:nvSpPr>
+        <p:spPr>
+          <a:xfrm>
+            <a:off x="1166399" y="1028700"/>
+            <a:ext cx="687324" cy="0"/>
+          </a:xfrm>
+          <a:prstGeom prst="line">
+            <a:avLst/>
+          </a:prstGeom>
+          <a:ln w="76200" cap="flat">
+            <a:solidFill>
+              <a:srgbClr val="000000"/>
+            </a:solidFill>
+            <a:prstDash val="solid"/>
+            <a:headEnd type="none" w="sm" len="sm"/>
+            <a:tailEnd type="none" w="sm" len="sm"/>
+          </a:ln>
+        </p:spPr>
+      </p:sp>
+      <p:sp>
+        <p:nvSpPr>
+          <p:cNvPr id="4" name="TextBox 4"/>
+          <p:cNvSpPr txBox="1"/>
+          <p:nvPr/>
+        </p:nvSpPr>
+        <p:spPr>
+          <a:xfrm>
+            <a:off x="13671125" y="9142095"/>
+            <a:ext cx="3450476" cy="273685"/>
+          </a:xfrm>
+          <a:prstGeom prst="rect">
+            <a:avLst/>
+          </a:prstGeom>
+        </p:spPr>
+        <p:txBody>
+          <a:bodyPr lIns="0" tIns="0" rIns="0" bIns="0" rtlCol="0" anchor="t">
+            <a:spAutoFit/>
+          </a:bodyPr>
+          <a:lstStyle/>
+          <a:p>
+            <a:pPr marL="0" lvl="0" indent="0" algn="r">
+              <a:lnSpc>
+                <a:spcPts val="2239"/>
+              </a:lnSpc>
+              <a:spcBef>
+                <a:spcPct val="0"/>
+              </a:spcBef>
+            </a:pPr>
+            <a:r>
+              <a:rPr lang="en-US" sz="1599" spc="159">
+                <a:solidFill>
+                  <a:srgbClr val="000000">
+                    <a:alpha val="49804"/>
+                  </a:srgbClr>
+                </a:solidFill>
+                <a:latin typeface="Open Sauce"/>
+                <a:ea typeface="Open Sauce"/>
+                <a:cs typeface="Open Sauce"/>
+                <a:sym typeface="Open Sauce"/>
+              </a:rPr>
+              <a:t>9</a:t>
+            </a:r>
+          </a:p>
+        </p:txBody>
       </p:sp>
     </p:spTree>
   </p:cSld>
@@ -5460,4 +6749,265 @@
   <a:objectDefaults/>
   <a:extraClrSchemeLst/>
 </a:theme>
+</file>
+
+<file path=ppt/theme/theme2.xml><?xml version="1.0" encoding="utf-8"?>
+<a:theme xmlns:a="http://schemas.openxmlformats.org/drawingml/2006/main" name="Office Theme">
+  <a:themeElements>
+    <a:clrScheme name="Office">
+      <a:dk1>
+        <a:sysClr val="windowText" lastClr="000000"/>
+      </a:dk1>
+      <a:lt1>
+        <a:sysClr val="window" lastClr="FFFFFF"/>
+      </a:lt1>
+      <a:dk2>
+        <a:srgbClr val="44546A"/>
+      </a:dk2>
+      <a:lt2>
+        <a:srgbClr val="E7E6E6"/>
+      </a:lt2>
+      <a:accent1>
+        <a:srgbClr val="5B9BD5"/>
+      </a:accent1>
+      <a:accent2>
+        <a:srgbClr val="ED7D31"/>
+      </a:accent2>
+      <a:accent3>
+        <a:srgbClr val="A5A5A5"/>
+      </a:accent3>
+      <a:accent4>
+        <a:srgbClr val="FFC000"/>
+      </a:accent4>
+      <a:accent5>
+        <a:srgbClr val="4472C4"/>
+      </a:accent5>
+      <a:accent6>
+        <a:srgbClr val="70AD47"/>
+      </a:accent6>
+      <a:hlink>
+        <a:srgbClr val="0563C1"/>
+      </a:hlink>
+      <a:folHlink>
+        <a:srgbClr val="954F72"/>
+      </a:folHlink>
+    </a:clrScheme>
+    <a:fontScheme name="Office">
+      <a:majorFont>
+        <a:latin typeface="Calibri Light" panose="020F0302020204030204"/>
+        <a:ea typeface=""/>
+        <a:cs typeface=""/>
+        <a:font script="Jpan" typeface="游ゴシック Light"/>
+        <a:font script="Hang" typeface="맑은 고딕"/>
+        <a:font script="Hans" typeface="等线 Light"/>
+        <a:font script="Hant" typeface="新細明體"/>
+        <a:font script="Arab" typeface="Times New Roman"/>
+        <a:font script="Hebr" typeface="Times New Roman"/>
+        <a:font script="Thai" typeface="Angsana New"/>
+        <a:font script="Ethi" typeface="Nyala"/>
+        <a:font script="Beng" typeface="Vrinda"/>
+        <a:font script="Gujr" typeface="Shruti"/>
+        <a:font script="Khmr" typeface="MoolBoran"/>
+        <a:font script="Knda" typeface="Tunga"/>
+        <a:font script="Guru" typeface="Raavi"/>
+        <a:font script="Cans" typeface="Euphemia"/>
+        <a:font script="Cher" typeface="Plantagenet Cherokee"/>
+        <a:font script="Yiii" typeface="Microsoft Yi Baiti"/>
+        <a:font script="Tibt" typeface="Microsoft Himalaya"/>
+        <a:font script="Thaa" typeface="MV Boli"/>
+        <a:font script="Deva" typeface="Mangal"/>
+        <a:font script="Telu" typeface="Gautami"/>
+        <a:font script="Taml" typeface="Latha"/>
+        <a:font script="Syrc" typeface="Estrangelo Edessa"/>
+        <a:font script="Orya" typeface="Kalinga"/>
+        <a:font script="Mlym" typeface="Kartika"/>
+        <a:font script="Laoo" typeface="DokChampa"/>
+        <a:font script="Sinh" typeface="Iskoola Pota"/>
+        <a:font script="Mong" typeface="Mongolian Baiti"/>
+        <a:font script="Viet" typeface="Times New Roman"/>
+        <a:font script="Uigh" typeface="Microsoft Uighur"/>
+        <a:font script="Geor" typeface="Sylfaen"/>
+      </a:majorFont>
+      <a:minorFont>
+        <a:latin typeface="Calibri" panose="020F0502020204030204"/>
+        <a:ea typeface=""/>
+        <a:cs typeface=""/>
+        <a:font script="Jpan" typeface="游ゴシック"/>
+        <a:font script="Hang" typeface="맑은 고딕"/>
+        <a:font script="Hans" typeface="等线"/>
+        <a:font script="Hant" typeface="新細明體"/>
+        <a:font script="Arab" typeface="Arial"/>
+        <a:font script="Hebr" typeface="Arial"/>
+        <a:font script="Thai" typeface="Cordia New"/>
+        <a:font script="Ethi" typeface="Nyala"/>
+        <a:font script="Beng" typeface="Vrinda"/>
+        <a:font script="Gujr" typeface="Shruti"/>
+        <a:font script="Khmr" typeface="DaunPenh"/>
+        <a:font script="Knda" typeface="Tunga"/>
+        <a:font script="Guru" typeface="Raavi"/>
+        <a:font script="Cans" typeface="Euphemia"/>
+        <a:font script="Cher" typeface="Plantagenet Cherokee"/>
+        <a:font script="Yiii" typeface="Microsoft Yi Baiti"/>
+        <a:font script="Tibt" typeface="Microsoft Himalaya"/>
+        <a:font script="Thaa" typeface="MV Boli"/>
+        <a:font script="Deva" typeface="Mangal"/>
+        <a:font script="Telu" typeface="Gautami"/>
+        <a:font script="Taml" typeface="Latha"/>
+        <a:font script="Syrc" typeface="Estrangelo Edessa"/>
+        <a:font script="Orya" typeface="Kalinga"/>
+        <a:font script="Mlym" typeface="Kartika"/>
+        <a:font script="Laoo" typeface="DokChampa"/>
+        <a:font script="Sinh" typeface="Iskoola Pota"/>
+        <a:font script="Mong" typeface="Mongolian Baiti"/>
+        <a:font script="Viet" typeface="Arial"/>
+        <a:font script="Uigh" typeface="Microsoft Uighur"/>
+        <a:font script="Geor" typeface="Sylfaen"/>
+      </a:minorFont>
+    </a:fontScheme>
+    <a:fmtScheme name="Office">
+      <a:fillStyleLst>
+        <a:solidFill>
+          <a:schemeClr val="phClr"/>
+        </a:solidFill>
+        <a:gradFill rotWithShape="1">
+          <a:gsLst>
+            <a:gs pos="0">
+              <a:schemeClr val="phClr">
+                <a:lumMod val="110000"/>
+                <a:satMod val="105000"/>
+                <a:tint val="67000"/>
+              </a:schemeClr>
+            </a:gs>
+            <a:gs pos="50000">
+              <a:schemeClr val="phClr">
+                <a:lumMod val="105000"/>
+                <a:satMod val="103000"/>
+                <a:tint val="73000"/>
+              </a:schemeClr>
+            </a:gs>
+            <a:gs pos="100000">
+              <a:schemeClr val="phClr">
+                <a:lumMod val="105000"/>
+                <a:satMod val="109000"/>
+                <a:tint val="81000"/>
+              </a:schemeClr>
+            </a:gs>
+          </a:gsLst>
+          <a:lin ang="5400000" scaled="0"/>
+        </a:gradFill>
+        <a:gradFill rotWithShape="1">
+          <a:gsLst>
+            <a:gs pos="0">
+              <a:schemeClr val="phClr">
+                <a:satMod val="103000"/>
+                <a:lumMod val="102000"/>
+                <a:tint val="94000"/>
+              </a:schemeClr>
+            </a:gs>
+            <a:gs pos="50000">
+              <a:schemeClr val="phClr">
+                <a:satMod val="110000"/>
+                <a:lumMod val="100000"/>
+                <a:shade val="100000"/>
+              </a:schemeClr>
+            </a:gs>
+            <a:gs pos="100000">
+              <a:schemeClr val="phClr">
+                <a:lumMod val="99000"/>
+                <a:satMod val="120000"/>
+                <a:shade val="78000"/>
+              </a:schemeClr>
+            </a:gs>
+          </a:gsLst>
+          <a:lin ang="5400000" scaled="0"/>
+        </a:gradFill>
+      </a:fillStyleLst>
+      <a:lnStyleLst>
+        <a:ln w="6350" cap="flat" cmpd="sng" algn="ctr">
+          <a:solidFill>
+            <a:schemeClr val="phClr"/>
+          </a:solidFill>
+          <a:prstDash val="solid"/>
+          <a:miter lim="800000"/>
+        </a:ln>
+        <a:ln w="12700" cap="flat" cmpd="sng" algn="ctr">
+          <a:solidFill>
+            <a:schemeClr val="phClr"/>
+          </a:solidFill>
+          <a:prstDash val="solid"/>
+          <a:miter lim="800000"/>
+        </a:ln>
+        <a:ln w="19050" cap="flat" cmpd="sng" algn="ctr">
+          <a:solidFill>
+            <a:schemeClr val="phClr"/>
+          </a:solidFill>
+          <a:prstDash val="solid"/>
+          <a:miter lim="800000"/>
+        </a:ln>
+      </a:lnStyleLst>
+      <a:effectStyleLst>
+        <a:effectStyle>
+          <a:effectLst/>
+        </a:effectStyle>
+        <a:effectStyle>
+          <a:effectLst/>
+        </a:effectStyle>
+        <a:effectStyle>
+          <a:effectLst>
+            <a:outerShdw blurRad="57150" dist="19050" dir="5400000" algn="ctr" rotWithShape="0">
+              <a:srgbClr val="000000">
+                <a:alpha val="63000"/>
+              </a:srgbClr>
+            </a:outerShdw>
+          </a:effectLst>
+        </a:effectStyle>
+      </a:effectStyleLst>
+      <a:bgFillStyleLst>
+        <a:solidFill>
+          <a:schemeClr val="phClr"/>
+        </a:solidFill>
+        <a:solidFill>
+          <a:schemeClr val="phClr">
+            <a:tint val="95000"/>
+            <a:satMod val="170000"/>
+          </a:schemeClr>
+        </a:solidFill>
+        <a:gradFill rotWithShape="1">
+          <a:gsLst>
+            <a:gs pos="0">
+              <a:schemeClr val="phClr">
+                <a:tint val="93000"/>
+                <a:satMod val="150000"/>
+                <a:shade val="98000"/>
+                <a:lumMod val="102000"/>
+              </a:schemeClr>
+            </a:gs>
+            <a:gs pos="50000">
+              <a:schemeClr val="phClr">
+                <a:tint val="98000"/>
+                <a:satMod val="130000"/>
+                <a:shade val="90000"/>
+                <a:lumMod val="103000"/>
+              </a:schemeClr>
+            </a:gs>
+            <a:gs pos="100000">
+              <a:schemeClr val="phClr">
+                <a:shade val="63000"/>
+                <a:satMod val="120000"/>
+              </a:schemeClr>
+            </a:gs>
+          </a:gsLst>
+          <a:lin ang="5400000" scaled="0"/>
+        </a:gradFill>
+      </a:bgFillStyleLst>
+    </a:fmtScheme>
+  </a:themeElements>
+  <a:objectDefaults/>
+  <a:extraClrSchemeLst/>
+  <a:extLst>
+    <a:ext uri="{05A4C25C-085E-4340-85A3-A5531E510DB2}">
+      <thm15:themeFamily xmlns:thm15="http://schemas.microsoft.com/office/thememl/2012/main" name="Office Theme" id="{62F939B6-93AF-4DB8-9C6B-D6C7DFDC589F}" vid="{4A3C46E8-61CC-4603-A589-7422A47A8E4A}"/>
+    </a:ext>
+  </a:extLst>
+</a:theme>
 </file>